--- a/presentation/Group4_HK_Parking_Vacancy_Prediction.pptx
+++ b/presentation/Group4_HK_Parking_Vacancy_Prediction.pptx
@@ -7,7 +7,6 @@
   <p:sldIdLst>
     <p:sldId id="256" r:id="rId7"/>
     <p:sldId id="258" r:id="rId9"/>
-    <p:sldId id="259" r:id="rId10"/>
     <p:sldId id="260" r:id="rId11"/>
     <p:sldId id="261" r:id="rId12"/>
     <p:sldId id="262" r:id="rId13"/>
@@ -3309,7 +3308,7 @@
                 <a:latin typeface="Calibri"/>
               </a:rPr>
               <a:t>「咪再兜」— Predict private-car vacancies 30–60 minutes ahead
-with official open data, ML baselines, and an AI Agent app</a:t>
+with official open data, Machine Learning baselines, and an AI Agent app</a:t>
             </a:r>
           </a:p>
         </p:txBody>
@@ -3470,361 +3469,6 @@
           <a:noFill/>
         </p:spPr>
         <p:txBody>
-          <a:bodyPr wrap="square">
-            <a:spAutoFit/>
-          </a:bodyPr>
-          <a:lstStyle/>
-          <a:p>
-            <a:pPr algn="l"/>
-            <a:r>
-              <a:rPr sz="1200" b="0">
-                <a:solidFill>
-                  <a:srgbClr val="64748B"/>
-                </a:solidFill>
-                <a:latin typeface="Calibri"/>
-              </a:rPr>
-              <a:t>Group 4  ·  咪再兜 / HK Parking Vacancy Prediction  ·  Capstone</a:t>
-            </a:r>
-          </a:p>
-        </p:txBody>
-      </p:sp>
-      <p:sp>
-        <p:nvSpPr>
-          <p:cNvPr id="5" name="TextBox 4"/>
-          <p:cNvSpPr txBox="1"/>
-          <p:nvPr/>
-        </p:nvSpPr>
-        <p:spPr>
-          <a:xfrm>
-            <a:off x="10515600" y="6492240"/>
-            <a:ext cx="1371600" cy="274320"/>
-          </a:xfrm>
-          <a:prstGeom prst="rect">
-            <a:avLst/>
-          </a:prstGeom>
-          <a:noFill/>
-        </p:spPr>
-        <p:txBody>
-          <a:bodyPr wrap="square">
-            <a:spAutoFit/>
-          </a:bodyPr>
-          <a:lstStyle/>
-          <a:p>
-            <a:pPr algn="r"/>
-            <a:r>
-              <a:rPr sz="1200" b="0">
-                <a:solidFill>
-                  <a:srgbClr val="64748B"/>
-                </a:solidFill>
-                <a:latin typeface="Calibri"/>
-              </a:rPr>
-              <a:t>10 / 11</a:t>
-            </a:r>
-          </a:p>
-        </p:txBody>
-      </p:sp>
-      <p:sp>
-        <p:nvSpPr>
-          <p:cNvPr id="6" name="TextBox 5"/>
-          <p:cNvSpPr txBox="1"/>
-          <p:nvPr/>
-        </p:nvSpPr>
-        <p:spPr>
-          <a:xfrm>
-            <a:off x="457200" y="320040"/>
-            <a:ext cx="11247120" cy="640080"/>
-          </a:xfrm>
-          <a:prstGeom prst="rect">
-            <a:avLst/>
-          </a:prstGeom>
-          <a:noFill/>
-        </p:spPr>
-        <p:txBody>
-          <a:bodyPr wrap="square">
-            <a:spAutoFit/>
-          </a:bodyPr>
-          <a:lstStyle/>
-          <a:p>
-            <a:pPr algn="l"/>
-            <a:r>
-              <a:rPr sz="3000" b="1">
-                <a:solidFill>
-                  <a:srgbClr val="0F172A"/>
-                </a:solidFill>
-                <a:latin typeface="Calibri"/>
-              </a:rPr>
-              <a:t>Conclusion</a:t>
-            </a:r>
-          </a:p>
-        </p:txBody>
-      </p:sp>
-      <p:sp>
-        <p:nvSpPr>
-          <p:cNvPr id="7" name="Rounded Rectangle 6"/>
-          <p:cNvSpPr/>
-          <p:nvPr/>
-        </p:nvSpPr>
-        <p:spPr>
-          <a:xfrm>
-            <a:off x="457200" y="1188720"/>
-            <a:ext cx="11247120" cy="4754880"/>
-          </a:xfrm>
-          <a:prstGeom prst="roundRect">
-            <a:avLst>
-              <a:gd name="adj" fmla="val 16667"/>
-            </a:avLst>
-          </a:prstGeom>
-          <a:solidFill>
-            <a:srgbClr val="F0FDFA"/>
-          </a:solidFill>
-          <a:ln w="19050">
-            <a:solidFill>
-              <a:srgbClr val="0D9488"/>
-            </a:solidFill>
-          </a:ln>
-        </p:spPr>
-        <p:style>
-          <a:lnRef idx="1">
-            <a:schemeClr val="accent1"/>
-          </a:lnRef>
-          <a:fillRef idx="3">
-            <a:schemeClr val="accent1"/>
-          </a:fillRef>
-          <a:effectRef idx="2">
-            <a:schemeClr val="accent1"/>
-          </a:effectRef>
-          <a:fontRef idx="minor">
-            <a:schemeClr val="lt1"/>
-          </a:fontRef>
-        </p:style>
-        <p:txBody>
-          <a:bodyPr rtlCol="0" anchor="ctr"/>
-          <a:lstStyle/>
-          <a:p>
-            <a:pPr algn="ctr"/>
-          </a:p>
-        </p:txBody>
-      </p:sp>
-      <p:sp>
-        <p:nvSpPr>
-          <p:cNvPr id="8" name="TextBox 7"/>
-          <p:cNvSpPr txBox="1"/>
-          <p:nvPr/>
-        </p:nvSpPr>
-        <p:spPr>
-          <a:xfrm>
-            <a:off x="731520" y="1463040"/>
-            <a:ext cx="10515600" cy="4206240"/>
-          </a:xfrm>
-          <a:prstGeom prst="rect">
-            <a:avLst/>
-          </a:prstGeom>
-          <a:noFill/>
-        </p:spPr>
-        <p:txBody>
-          <a:bodyPr wrap="square">
-            <a:spAutoFit/>
-          </a:bodyPr>
-          <a:lstStyle/>
-          <a:p>
-            <a:pPr algn="l">
-              <a:spcBef>
-                <a:spcPts val="600"/>
-              </a:spcBef>
-              <a:spcAft>
-                <a:spcPts val="1800"/>
-              </a:spcAft>
-            </a:pPr>
-            <a:r>
-              <a:rPr sz="1800" b="0">
-                <a:solidFill>
-                  <a:srgbClr val="0F172A"/>
-                </a:solidFill>
-                <a:latin typeface="Calibri"/>
-              </a:rPr>
-              <a:t>•  Built an end-to-end data → ML → AI Agent product for HK parking vacancy</a:t>
-            </a:r>
-          </a:p>
-          <a:p>
-            <a:pPr algn="l">
-              <a:spcBef>
-                <a:spcPts val="600"/>
-              </a:spcBef>
-              <a:spcAft>
-                <a:spcPts val="1800"/>
-              </a:spcAft>
-            </a:pPr>
-            <a:r>
-              <a:rPr sz="1800" b="0">
-                <a:solidFill>
-                  <a:srgbClr val="0F172A"/>
-                </a:solidFill>
-                <a:latin typeface="Calibri"/>
-              </a:rPr>
-              <a:t>•  Gradient Boosting improves MAE from ~17.8 → 10.40; classification F1 ≈ 0.957</a:t>
-            </a:r>
-          </a:p>
-          <a:p>
-            <a:pPr algn="l">
-              <a:spcBef>
-                <a:spcPts val="600"/>
-              </a:spcBef>
-              <a:spcAft>
-                <a:spcPts val="1800"/>
-              </a:spcAft>
-            </a:pPr>
-            <a:r>
-              <a:rPr sz="1800" b="0">
-                <a:solidFill>
-                  <a:srgbClr val="0F172A"/>
-                </a:solidFill>
-                <a:latin typeface="Calibri"/>
-              </a:rPr>
-              <a:t>•  「咪再兜」lets drivers ask in Cantonese (text/voice) and get ranked suggestions</a:t>
-            </a:r>
-          </a:p>
-          <a:p>
-            <a:pPr algn="l">
-              <a:spcBef>
-                <a:spcPts val="600"/>
-              </a:spcBef>
-              <a:spcAft>
-                <a:spcPts val="1800"/>
-              </a:spcAft>
-            </a:pPr>
-            <a:r>
-              <a:rPr sz="1800" b="0">
-                <a:solidFill>
-                  <a:srgbClr val="0F172A"/>
-                </a:solidFill>
-                <a:latin typeface="Calibri"/>
-              </a:rPr>
-              <a:t>•  Foundation ready for longer history, richer features, and always-on cloud ETL</a:t>
-            </a:r>
-          </a:p>
-        </p:txBody>
-      </p:sp>
-    </p:spTree>
-  </p:cSld>
-  <p:clrMapOvr>
-    <a:masterClrMapping/>
-  </p:clrMapOvr>
-</p:sld>
-</file>
-
-<file path=ppt/slides/slide11.xml><?xml version="1.0" encoding="utf-8"?>
-<p:sld xmlns:a="http://schemas.openxmlformats.org/drawingml/2006/main" xmlns:p="http://schemas.openxmlformats.org/presentationml/2006/main" xmlns:r="http://schemas.openxmlformats.org/officeDocument/2006/relationships">
-  <p:cSld>
-    <p:spTree>
-      <p:nvGrpSpPr>
-        <p:cNvPr id="1" name=""/>
-        <p:cNvGrpSpPr/>
-        <p:nvPr/>
-      </p:nvGrpSpPr>
-      <p:grpSpPr/>
-      <p:sp>
-        <p:nvSpPr>
-          <p:cNvPr id="2" name="Rectangle 1"/>
-          <p:cNvSpPr/>
-          <p:nvPr/>
-        </p:nvSpPr>
-        <p:spPr>
-          <a:xfrm>
-            <a:off x="0" y="0"/>
-            <a:ext cx="12191695" cy="6858000"/>
-          </a:xfrm>
-          <a:prstGeom prst="rect">
-            <a:avLst/>
-          </a:prstGeom>
-          <a:solidFill>
-            <a:srgbClr val="F8FAFC"/>
-          </a:solidFill>
-          <a:ln>
-            <a:noFill/>
-          </a:ln>
-        </p:spPr>
-        <p:style>
-          <a:lnRef idx="1">
-            <a:schemeClr val="accent1"/>
-          </a:lnRef>
-          <a:fillRef idx="3">
-            <a:schemeClr val="accent1"/>
-          </a:fillRef>
-          <a:effectRef idx="2">
-            <a:schemeClr val="accent1"/>
-          </a:effectRef>
-          <a:fontRef idx="minor">
-            <a:schemeClr val="lt1"/>
-          </a:fontRef>
-        </p:style>
-        <p:txBody>
-          <a:bodyPr rtlCol="0" anchor="ctr"/>
-          <a:lstStyle/>
-          <a:p>
-            <a:pPr algn="ctr"/>
-          </a:p>
-        </p:txBody>
-      </p:sp>
-      <p:sp>
-        <p:nvSpPr>
-          <p:cNvPr id="3" name="Rectangle 2"/>
-          <p:cNvSpPr/>
-          <p:nvPr/>
-        </p:nvSpPr>
-        <p:spPr>
-          <a:xfrm>
-            <a:off x="0" y="0"/>
-            <a:ext cx="12191695" cy="109728"/>
-          </a:xfrm>
-          <a:prstGeom prst="rect">
-            <a:avLst/>
-          </a:prstGeom>
-          <a:solidFill>
-            <a:srgbClr val="0D9488"/>
-          </a:solidFill>
-          <a:ln>
-            <a:noFill/>
-          </a:ln>
-        </p:spPr>
-        <p:style>
-          <a:lnRef idx="1">
-            <a:schemeClr val="accent1"/>
-          </a:lnRef>
-          <a:fillRef idx="3">
-            <a:schemeClr val="accent1"/>
-          </a:fillRef>
-          <a:effectRef idx="2">
-            <a:schemeClr val="accent1"/>
-          </a:effectRef>
-          <a:fontRef idx="minor">
-            <a:schemeClr val="lt1"/>
-          </a:fontRef>
-        </p:style>
-        <p:txBody>
-          <a:bodyPr rtlCol="0" anchor="ctr"/>
-          <a:lstStyle/>
-          <a:p>
-            <a:pPr algn="ctr"/>
-          </a:p>
-        </p:txBody>
-      </p:sp>
-      <p:sp>
-        <p:nvSpPr>
-          <p:cNvPr id="4" name="TextBox 3"/>
-          <p:cNvSpPr txBox="1"/>
-          <p:nvPr/>
-        </p:nvSpPr>
-        <p:spPr>
-          <a:xfrm>
-            <a:off x="457200" y="6492240"/>
-            <a:ext cx="9144000" cy="274320"/>
-          </a:xfrm>
-          <a:prstGeom prst="rect">
-            <a:avLst/>
-          </a:prstGeom>
-          <a:noFill/>
-        </p:spPr>
-        <p:txBody>
           <a:bodyPr wrap="none">
             <a:spAutoFit/>
           </a:bodyPr>
@@ -3872,7 +3516,7 @@
                 </a:solidFill>
                 <a:latin typeface="Calibri"/>
               </a:rPr>
-              <a:t>11 / 11</a:t>
+              <a:t>10 / 10</a:t>
             </a:r>
           </a:p>
         </p:txBody>
@@ -4218,7 +3862,7 @@
                 </a:solidFill>
                 <a:latin typeface="Calibri"/>
               </a:rPr>
-              <a:t>2 / 11</a:t>
+              <a:t>2 / 10</a:t>
             </a:r>
           </a:p>
         </p:txBody>
@@ -4359,7 +4003,9 @@
           </a:bodyPr>
           <a:lstStyle/>
           <a:p>
-            <a:pPr>
+            <a:pPr marL="228600" indent="-228600">
+              <a:buFont typeface="Arial"/>
+              <a:buChar char="•"/>
               <a:spcAft>
                 <a:spcPts val="600"/>
               </a:spcAft>
@@ -4371,11 +4017,13 @@
                 </a:solidFill>
                 <a:latin typeface="Calibri"/>
               </a:rPr>
-              <a:t>• Finding parking in HK is time-consuming and stressful</a:t>
-            </a:r>
-          </a:p>
-          <a:p>
-            <a:pPr>
+              <a:t>Finding parking in HK is time-consuming and stressful</a:t>
+            </a:r>
+          </a:p>
+          <a:p>
+            <a:pPr marL="228600" indent="-228600">
+              <a:buFont typeface="Arial"/>
+              <a:buChar char="•"/>
               <a:spcAft>
                 <a:spcPts val="600"/>
               </a:spcAft>
@@ -4387,11 +4035,13 @@
                 </a:solidFill>
                 <a:latin typeface="Calibri"/>
               </a:rPr>
-              <a:t>• Drivers circle without knowing where spaces will open</a:t>
-            </a:r>
-          </a:p>
-          <a:p>
-            <a:pPr>
+              <a:t>Drivers circle without knowing where spaces will open</a:t>
+            </a:r>
+          </a:p>
+          <a:p>
+            <a:pPr marL="228600" indent="-228600">
+              <a:buFont typeface="Arial"/>
+              <a:buChar char="•"/>
               <a:spcAft>
                 <a:spcPts val="600"/>
               </a:spcAft>
@@ -4403,11 +4053,13 @@
                 </a:solidFill>
                 <a:latin typeface="Calibri"/>
               </a:rPr>
-              <a:t>• Official vacancy data exists — but hard to use in real time</a:t>
-            </a:r>
-          </a:p>
-          <a:p>
-            <a:pPr>
+              <a:t>Official vacancy data exists — but hard to use in real time</a:t>
+            </a:r>
+          </a:p>
+          <a:p>
+            <a:pPr marL="228600" indent="-228600">
+              <a:buFont typeface="Arial"/>
+              <a:buChar char="•"/>
               <a:spcAft>
                 <a:spcPts val="600"/>
               </a:spcAft>
@@ -4419,7 +4071,7 @@
                 </a:solidFill>
                 <a:latin typeface="Calibri"/>
               </a:rPr>
-              <a:t>• Need forward-looking guidance, not only “now”</a:t>
+              <a:t>Need forward-looking guidance, not only “now”</a:t>
             </a:r>
           </a:p>
         </p:txBody>
@@ -4707,7 +4359,7 @@
                 </a:solidFill>
                 <a:latin typeface="Calibri"/>
               </a:rPr>
-              <a:t>3 / 11</a:t>
+              <a:t>3 / 10</a:t>
             </a:r>
           </a:p>
         </p:txBody>
@@ -4741,7 +4393,7 @@
                 </a:solidFill>
                 <a:latin typeface="Calibri"/>
               </a:rPr>
-              <a:t>Project Objectives</a:t>
+              <a:t>Dataset Description</a:t>
             </a:r>
           </a:p>
         </p:txBody>
@@ -4754,8 +4406,8 @@
         </p:nvSpPr>
         <p:spPr>
           <a:xfrm>
-            <a:off x="457200" y="1143000"/>
-            <a:ext cx="11247120" cy="822960"/>
+            <a:off x="457200" y="1188720"/>
+            <a:ext cx="2743200" cy="1554480"/>
           </a:xfrm>
           <a:prstGeom prst="roundRect">
             <a:avLst/>
@@ -4799,8 +4451,8 @@
         </p:nvSpPr>
         <p:spPr>
           <a:xfrm>
-            <a:off x="685800" y="1280160"/>
-            <a:ext cx="2011680" cy="502920"/>
+            <a:off x="640080" y="1508760"/>
+            <a:ext cx="2377440" cy="548640"/>
           </a:xfrm>
           <a:prstGeom prst="rect">
             <a:avLst/>
@@ -4815,13 +4467,13 @@
           <a:p>
             <a:pPr algn="ctr"/>
             <a:r>
-              <a:rPr sz="2200" b="1">
+              <a:rPr sz="3000" b="1">
                 <a:solidFill>
                   <a:srgbClr val="0D9488"/>
                 </a:solidFill>
                 <a:latin typeface="Calibri"/>
               </a:rPr>
-              <a:t>1. Collect</a:t>
+              <a:t>~592</a:t>
             </a:r>
           </a:p>
         </p:txBody>
@@ -4834,8 +4486,8 @@
         </p:nvSpPr>
         <p:spPr>
           <a:xfrm>
-            <a:off x="2743200" y="1344168"/>
-            <a:ext cx="8595360" cy="502920"/>
+            <a:off x="640080" y="2148840"/>
+            <a:ext cx="2377440" cy="411480"/>
           </a:xfrm>
           <a:prstGeom prst="rect">
             <a:avLst/>
@@ -4848,15 +4500,15 @@
           </a:bodyPr>
           <a:lstStyle/>
           <a:p>
-            <a:pPr algn="l"/>
-            <a:r>
-              <a:rPr sz="1800" b="0">
-                <a:solidFill>
-                  <a:srgbClr val="0F172A"/>
-                </a:solidFill>
-                <a:latin typeface="Calibri"/>
-              </a:rPr>
-              <a:t>Automate TD Parking Vacancy API + HKO weather every ~10 minutes</a:t>
+            <a:pPr algn="ctr"/>
+            <a:r>
+              <a:rPr sz="1400" b="0">
+                <a:solidFill>
+                  <a:srgbClr val="64748B"/>
+                </a:solidFill>
+                <a:latin typeface="Calibri"/>
+              </a:rPr>
+              <a:t>Car parks (territory-wide)</a:t>
             </a:r>
           </a:p>
         </p:txBody>
@@ -4869,8 +4521,8 @@
         </p:nvSpPr>
         <p:spPr>
           <a:xfrm>
-            <a:off x="457200" y="2103120"/>
-            <a:ext cx="11247120" cy="822960"/>
+            <a:off x="3383280" y="1188720"/>
+            <a:ext cx="2743200" cy="1554480"/>
           </a:xfrm>
           <a:prstGeom prst="roundRect">
             <a:avLst/>
@@ -4914,8 +4566,8 @@
         </p:nvSpPr>
         <p:spPr>
           <a:xfrm>
-            <a:off x="685800" y="2240279"/>
-            <a:ext cx="2011680" cy="502920"/>
+            <a:off x="3566160" y="1508760"/>
+            <a:ext cx="2377440" cy="548640"/>
           </a:xfrm>
           <a:prstGeom prst="rect">
             <a:avLst/>
@@ -4930,13 +4582,13 @@
           <a:p>
             <a:pPr algn="ctr"/>
             <a:r>
-              <a:rPr sz="2200" b="1">
+              <a:rPr sz="3000" b="1">
                 <a:solidFill>
                   <a:srgbClr val="0D9488"/>
                 </a:solidFill>
                 <a:latin typeface="Calibri"/>
               </a:rPr>
-              <a:t>2. Store</a:t>
+              <a:t>~18</a:t>
             </a:r>
           </a:p>
         </p:txBody>
@@ -4949,8 +4601,8 @@
         </p:nvSpPr>
         <p:spPr>
           <a:xfrm>
-            <a:off x="2743200" y="2304288"/>
-            <a:ext cx="8595360" cy="502920"/>
+            <a:off x="3566160" y="2148840"/>
+            <a:ext cx="2377440" cy="411480"/>
           </a:xfrm>
           <a:prstGeom prst="rect">
             <a:avLst/>
@@ -4963,15 +4615,15 @@
           </a:bodyPr>
           <a:lstStyle/>
           <a:p>
-            <a:pPr algn="l"/>
-            <a:r>
-              <a:rPr sz="1800" b="0">
-                <a:solidFill>
-                  <a:srgbClr val="0F172A"/>
-                </a:solidFill>
-                <a:latin typeface="Calibri"/>
-              </a:rPr>
-              <a:t>ETL into SQLite / Supabase (carparks, vacancy_records, weather)</a:t>
+            <a:pPr algn="ctr"/>
+            <a:r>
+              <a:rPr sz="1400" b="0">
+                <a:solidFill>
+                  <a:srgbClr val="64748B"/>
+                </a:solidFill>
+                <a:latin typeface="Calibri"/>
+              </a:rPr>
+              <a:t>HK districts covered</a:t>
             </a:r>
           </a:p>
         </p:txBody>
@@ -4984,8 +4636,8 @@
         </p:nvSpPr>
         <p:spPr>
           <a:xfrm>
-            <a:off x="457200" y="3063240"/>
-            <a:ext cx="11247120" cy="822960"/>
+            <a:off x="457200" y="3017520"/>
+            <a:ext cx="2743200" cy="1554480"/>
           </a:xfrm>
           <a:prstGeom prst="roundRect">
             <a:avLst/>
@@ -5029,8 +4681,8 @@
         </p:nvSpPr>
         <p:spPr>
           <a:xfrm>
-            <a:off x="685800" y="3200400"/>
-            <a:ext cx="2011680" cy="502920"/>
+            <a:off x="640080" y="3337560"/>
+            <a:ext cx="2377440" cy="548640"/>
           </a:xfrm>
           <a:prstGeom prst="rect">
             <a:avLst/>
@@ -5045,13 +4697,13 @@
           <a:p>
             <a:pPr algn="ctr"/>
             <a:r>
-              <a:rPr sz="2200" b="1">
+              <a:rPr sz="3000" b="1">
                 <a:solidFill>
                   <a:srgbClr val="0D9488"/>
                 </a:solidFill>
                 <a:latin typeface="Calibri"/>
               </a:rPr>
-              <a:t>3. Model</a:t>
+              <a:t>~34.9k</a:t>
             </a:r>
           </a:p>
         </p:txBody>
@@ -5064,8 +4716,8 @@
         </p:nvSpPr>
         <p:spPr>
           <a:xfrm>
-            <a:off x="2743200" y="3264408"/>
-            <a:ext cx="8595360" cy="502920"/>
+            <a:off x="640080" y="3977639"/>
+            <a:ext cx="2377440" cy="411480"/>
           </a:xfrm>
           <a:prstGeom prst="rect">
             <a:avLst/>
@@ -5078,15 +4730,15 @@
           </a:bodyPr>
           <a:lstStyle/>
           <a:p>
-            <a:pPr algn="l"/>
-            <a:r>
-              <a:rPr sz="1800" b="0">
-                <a:solidFill>
-                  <a:srgbClr val="0F172A"/>
-                </a:solidFill>
-                <a:latin typeface="Calibri"/>
-              </a:rPr>
-              <a:t>Baseline + Gradient Boosting for count &amp; has-vacancy</a:t>
+            <a:pPr algn="ctr"/>
+            <a:r>
+              <a:rPr sz="1400" b="0">
+                <a:solidFill>
+                  <a:srgbClr val="64748B"/>
+                </a:solidFill>
+                <a:latin typeface="Calibri"/>
+              </a:rPr>
+              <a:t>Historical snapshots (1 yr)</a:t>
             </a:r>
           </a:p>
         </p:txBody>
@@ -5099,8 +4751,8 @@
         </p:nvSpPr>
         <p:spPr>
           <a:xfrm>
-            <a:off x="457200" y="4023360"/>
-            <a:ext cx="11247120" cy="822960"/>
+            <a:off x="3383280" y="3017520"/>
+            <a:ext cx="2743200" cy="1554480"/>
           </a:xfrm>
           <a:prstGeom prst="roundRect">
             <a:avLst/>
@@ -5144,8 +4796,8 @@
         </p:nvSpPr>
         <p:spPr>
           <a:xfrm>
-            <a:off x="685800" y="4160520"/>
-            <a:ext cx="2011680" cy="502920"/>
+            <a:off x="3566160" y="3337560"/>
+            <a:ext cx="2377440" cy="548640"/>
           </a:xfrm>
           <a:prstGeom prst="rect">
             <a:avLst/>
@@ -5160,13 +4812,13 @@
           <a:p>
             <a:pPr algn="ctr"/>
             <a:r>
-              <a:rPr sz="2200" b="1">
+              <a:rPr sz="3000" b="1">
                 <a:solidFill>
                   <a:srgbClr val="0D9488"/>
                 </a:solidFill>
                 <a:latin typeface="Calibri"/>
               </a:rPr>
-              <a:t>4. Serve</a:t>
+              <a:t>~10 min</a:t>
             </a:r>
           </a:p>
         </p:txBody>
@@ -5179,8 +4831,8 @@
         </p:nvSpPr>
         <p:spPr>
           <a:xfrm>
-            <a:off x="2743200" y="4224528"/>
-            <a:ext cx="8595360" cy="502920"/>
+            <a:off x="3566160" y="3977639"/>
+            <a:ext cx="2377440" cy="411480"/>
           </a:xfrm>
           <a:prstGeom prst="rect">
             <a:avLst/>
@@ -5193,15 +4845,15 @@
           </a:bodyPr>
           <a:lstStyle/>
           <a:p>
-            <a:pPr algn="l"/>
-            <a:r>
-              <a:rPr sz="1800" b="0">
-                <a:solidFill>
-                  <a:srgbClr val="0F172A"/>
-                </a:solidFill>
-                <a:latin typeface="Calibri"/>
-              </a:rPr>
-              <a:t>Ship Streamlit AI Agent「咪再兜」for natural-language queries</a:t>
+            <a:pPr algn="ctr"/>
+            <a:r>
+              <a:rPr sz="1400" b="0">
+                <a:solidFill>
+                  <a:srgbClr val="64748B"/>
+                </a:solidFill>
+                <a:latin typeface="Calibri"/>
+              </a:rPr>
+              <a:t>Collection cadence</a:t>
             </a:r>
           </a:p>
         </p:txBody>
@@ -5214,8 +4866,8 @@
         </p:nvSpPr>
         <p:spPr>
           <a:xfrm>
-            <a:off x="457200" y="4983480"/>
-            <a:ext cx="11247120" cy="822960"/>
+            <a:off x="6400800" y="1188720"/>
+            <a:ext cx="5303520" cy="4892040"/>
           </a:xfrm>
           <a:prstGeom prst="roundRect">
             <a:avLst/>
@@ -5259,8 +4911,8 @@
         </p:nvSpPr>
         <p:spPr>
           <a:xfrm>
-            <a:off x="685800" y="5120640"/>
-            <a:ext cx="2011680" cy="502920"/>
+            <a:off x="6583680" y="1371600"/>
+            <a:ext cx="4937760" cy="365760"/>
           </a:xfrm>
           <a:prstGeom prst="rect">
             <a:avLst/>
@@ -5281,7 +4933,7 @@
                 </a:solidFill>
                 <a:latin typeface="Calibri"/>
               </a:rPr>
-              <a:t>5. Validate</a:t>
+              <a:t>Sources &amp; characteristics</a:t>
             </a:r>
           </a:p>
         </p:txBody>
@@ -5294,8 +4946,8 @@
         </p:nvSpPr>
         <p:spPr>
           <a:xfrm>
-            <a:off x="2743200" y="5184648"/>
-            <a:ext cx="8595360" cy="502920"/>
+            <a:off x="6583680" y="1828800"/>
+            <a:ext cx="4937760" cy="3995928"/>
           </a:xfrm>
           <a:prstGeom prst="rect">
             <a:avLst/>
@@ -5303,20 +4955,224 @@
           <a:noFill/>
         </p:spPr>
         <p:txBody>
-          <a:bodyPr wrap="square">
+          <a:bodyPr wrap="square" bIns="164592">
             <a:spAutoFit/>
           </a:bodyPr>
           <a:lstStyle/>
           <a:p>
-            <a:pPr algn="l"/>
-            <a:r>
-              <a:rPr sz="1800" b="0">
+            <a:pPr marL="228600" indent="-228600">
+              <a:buFont typeface="Arial"/>
+              <a:buChar char="•"/>
+              <a:lnSpc>
+                <a:spcPct val="115000"/>
+              </a:lnSpc>
+              <a:spcBef>
+                <a:spcPts val="200"/>
+              </a:spcBef>
+              <a:spcAft>
+                <a:spcPts val="300"/>
+              </a:spcAft>
+            </a:pPr>
+            <a:r>
+              <a:rPr sz="1400" b="0">
                 <a:solidFill>
                   <a:srgbClr val="0F172A"/>
                 </a:solidFill>
                 <a:latin typeface="Calibri"/>
               </a:rPr>
-              <a:t>Time-based evaluation vs historical average baseline</a:t>
+              <a:t>Transport Department (TD) / data.gov.hk Carpark Info Vacancy API (live + fees)</a:t>
+            </a:r>
+          </a:p>
+          <a:p>
+            <a:pPr marL="228600" indent="-228600">
+              <a:buFont typeface="Arial"/>
+              <a:buChar char="•"/>
+              <a:lnSpc>
+                <a:spcPct val="115000"/>
+              </a:lnSpc>
+              <a:spcBef>
+                <a:spcPts val="200"/>
+              </a:spcBef>
+              <a:spcAft>
+                <a:spcPts val="300"/>
+              </a:spcAft>
+            </a:pPr>
+            <a:r>
+              <a:rPr sz="1400" b="0">
+                <a:solidFill>
+                  <a:srgbClr val="0F172A"/>
+                </a:solidFill>
+                <a:latin typeface="Calibri"/>
+              </a:rPr>
+              <a:t>Hong Kong Observatory (HKO) Weather API (temp, humidity, regional stations)</a:t>
+            </a:r>
+          </a:p>
+          <a:p>
+            <a:pPr marL="228600" indent="-228600">
+              <a:buFont typeface="Arial"/>
+              <a:buChar char="•"/>
+              <a:lnSpc>
+                <a:spcPct val="115000"/>
+              </a:lnSpc>
+              <a:spcBef>
+                <a:spcPts val="200"/>
+              </a:spcBef>
+              <a:spcAft>
+                <a:spcPts val="300"/>
+              </a:spcAft>
+            </a:pPr>
+            <a:r>
+              <a:rPr sz="1500" b="0">
+                <a:solidFill>
+                  <a:srgbClr val="0F172A"/>
+                </a:solidFill>
+                <a:latin typeface="Calibri"/>
+              </a:rPr>
+              <a:t>Supabase Postgres API (carparks, vacancy, weather)</a:t>
+            </a:r>
+          </a:p>
+          <a:p>
+            <a:pPr marL="228600" indent="-228600">
+              <a:buFont typeface="Arial"/>
+              <a:buChar char="•"/>
+              <a:lnSpc>
+                <a:spcPct val="115000"/>
+              </a:lnSpc>
+              <a:spcBef>
+                <a:spcPts val="200"/>
+              </a:spcBef>
+              <a:spcAft>
+                <a:spcPts val="300"/>
+              </a:spcAft>
+            </a:pPr>
+            <a:r>
+              <a:rPr sz="1400" b="0">
+                <a:solidFill>
+                  <a:srgbClr val="0F172A"/>
+                </a:solidFill>
+                <a:latin typeface="Calibri"/>
+              </a:rPr>
+              <a:t>DeepSeek Chat API (natural language (NL) intent / agent replies)</a:t>
+            </a:r>
+          </a:p>
+          <a:p>
+            <a:pPr marL="228600" indent="-228600">
+              <a:buFont typeface="Arial"/>
+              <a:buChar char="•"/>
+              <a:lnSpc>
+                <a:spcPct val="115000"/>
+              </a:lnSpc>
+              <a:spcBef>
+                <a:spcPts val="200"/>
+              </a:spcBef>
+              <a:spcAft>
+                <a:spcPts val="300"/>
+              </a:spcAft>
+            </a:pPr>
+            <a:r>
+              <a:rPr sz="1500" b="0">
+                <a:solidFill>
+                  <a:srgbClr val="0F172A"/>
+                </a:solidFill>
+                <a:latin typeface="Calibri"/>
+              </a:rPr>
+              <a:t>Google Maps Geocoding + Maps JavaScript APIs</a:t>
+            </a:r>
+          </a:p>
+          <a:p>
+            <a:pPr marL="228600" indent="-228600">
+              <a:buFont typeface="Arial"/>
+              <a:buChar char="•"/>
+              <a:lnSpc>
+                <a:spcPct val="115000"/>
+              </a:lnSpc>
+              <a:spcBef>
+                <a:spcPts val="200"/>
+              </a:spcBef>
+              <a:spcAft>
+                <a:spcPts val="300"/>
+              </a:spcAft>
+            </a:pPr>
+            <a:r>
+              <a:rPr sz="1500" b="0">
+                <a:solidFill>
+                  <a:srgbClr val="0F172A"/>
+                </a:solidFill>
+                <a:latin typeface="Calibri"/>
+              </a:rPr>
+              <a:t>Google Speech Recognition API (voice input)</a:t>
+            </a:r>
+          </a:p>
+          <a:p>
+            <a:pPr marL="228600" indent="-228600">
+              <a:buFont typeface="Arial"/>
+              <a:buChar char="•"/>
+              <a:lnSpc>
+                <a:spcPct val="115000"/>
+              </a:lnSpc>
+              <a:spcBef>
+                <a:spcPts val="200"/>
+              </a:spcBef>
+              <a:spcAft>
+                <a:spcPts val="300"/>
+              </a:spcAft>
+            </a:pPr>
+            <a:r>
+              <a:rPr sz="1400" b="0">
+                <a:solidFill>
+                  <a:srgbClr val="0F172A"/>
+                </a:solidFill>
+                <a:latin typeface="Calibri"/>
+              </a:rPr>
+              <a:t>Microsoft Edge Text-to-Speech (Cantonese voice output)</a:t>
+            </a:r>
+          </a:p>
+          <a:p>
+            <a:pPr marL="228600" indent="-228600">
+              <a:buFont typeface="Arial"/>
+              <a:buChar char="•"/>
+              <a:lnSpc>
+                <a:spcPct val="115000"/>
+              </a:lnSpc>
+              <a:spcBef>
+                <a:spcPts val="200"/>
+              </a:spcBef>
+              <a:spcAft>
+                <a:spcPts val="300"/>
+              </a:spcAft>
+            </a:pPr>
+            <a:r>
+              <a:rPr sz="1400" b="0">
+                <a:solidFill>
+                  <a:srgbClr val="0F172A"/>
+                </a:solidFill>
+                <a:latin typeface="Calibri"/>
+              </a:rPr>
+              <a:t>Features: hour, day of week (DOW), weekend, park/district, temperature</a:t>
+            </a:r>
+          </a:p>
+          <a:p>
+            <a:pPr marL="228600" indent="-228600">
+              <a:buFont typeface="Arial"/>
+              <a:buChar char="•"/>
+              <a:lnSpc>
+                <a:spcPct val="115000"/>
+              </a:lnSpc>
+              <a:spcBef>
+                <a:spcPts val="200"/>
+              </a:spcBef>
+              <a:spcAft>
+                <a:spcPts val="300"/>
+              </a:spcAft>
+            </a:pPr>
+            <a:r>
+              <a:rPr sz="1500" b="0">
+                <a:solidFill>
+                  <a:srgbClr val="0F172A"/>
+                </a:solidFill>
+                <a:latin typeface="Calibri"/>
+              </a:rPr>
+              <a:t>Scope: car-park vacancy, not on-street meters</a:t>
             </a:r>
           </a:p>
         </p:txBody>
@@ -5489,7 +5345,7 @@
                 </a:solidFill>
                 <a:latin typeface="Calibri"/>
               </a:rPr>
-              <a:t>4 / 11</a:t>
+              <a:t>4 / 10</a:t>
             </a:r>
           </a:p>
         </p:txBody>
@@ -5523,21 +5379,21 @@
                 </a:solidFill>
                 <a:latin typeface="Calibri"/>
               </a:rPr>
-              <a:t>Dataset Description</a:t>
-            </a:r>
-          </a:p>
-        </p:txBody>
-      </p:sp>
-      <p:sp>
-        <p:nvSpPr>
-          <p:cNvPr id="7" name="Rounded Rectangle 6"/>
+              <a:t>Methodology &amp; Pipeline</a:t>
+            </a:r>
+          </a:p>
+        </p:txBody>
+      </p:sp>
+      <p:sp>
+        <p:nvSpPr>
+          <p:cNvPr id="8" name="Rounded Rectangle 7"/>
           <p:cNvSpPr/>
           <p:nvPr/>
         </p:nvSpPr>
         <p:spPr>
           <a:xfrm>
-            <a:off x="457200" y="1188720"/>
-            <a:ext cx="2743200" cy="1554480"/>
+            <a:off x="457200" y="3611880"/>
+            <a:ext cx="3657600" cy="2743200"/>
           </a:xfrm>
           <a:prstGeom prst="roundRect">
             <a:avLst/>
@@ -5575,14 +5431,14 @@
       </p:sp>
       <p:sp>
         <p:nvSpPr>
-          <p:cNvPr id="8" name="TextBox 7"/>
+          <p:cNvPr id="9" name="TextBox 8"/>
           <p:cNvSpPr txBox="1"/>
           <p:nvPr/>
         </p:nvSpPr>
         <p:spPr>
           <a:xfrm>
-            <a:off x="640080" y="1508760"/>
-            <a:ext cx="2377440" cy="548640"/>
+            <a:off x="640080" y="3794760"/>
+            <a:ext cx="3291840" cy="320040"/>
           </a:xfrm>
           <a:prstGeom prst="rect">
             <a:avLst/>
@@ -5597,27 +5453,27 @@
           <a:p>
             <a:pPr algn="ctr"/>
             <a:r>
-              <a:rPr sz="3000" b="1">
+              <a:rPr sz="2000" b="1">
                 <a:solidFill>
                   <a:srgbClr val="0D9488"/>
                 </a:solidFill>
                 <a:latin typeface="Calibri"/>
               </a:rPr>
-              <a:t>~587+</a:t>
-            </a:r>
-          </a:p>
-        </p:txBody>
-      </p:sp>
-      <p:sp>
-        <p:nvSpPr>
-          <p:cNvPr id="9" name="TextBox 8"/>
+              <a:t>Baseline</a:t>
+            </a:r>
+          </a:p>
+        </p:txBody>
+      </p:sp>
+      <p:sp>
+        <p:nvSpPr>
+          <p:cNvPr id="10" name="TextBox 9"/>
           <p:cNvSpPr txBox="1"/>
           <p:nvPr/>
         </p:nvSpPr>
         <p:spPr>
           <a:xfrm>
-            <a:off x="640080" y="2148840"/>
-            <a:ext cx="2377440" cy="411480"/>
+            <a:off x="640080" y="4251960"/>
+            <a:ext cx="3291840" cy="1828800"/>
           </a:xfrm>
           <a:prstGeom prst="rect">
             <a:avLst/>
@@ -5630,29 +5486,71 @@
           </a:bodyPr>
           <a:lstStyle/>
           <a:p>
-            <a:pPr algn="ctr"/>
-            <a:r>
-              <a:rPr sz="1400" b="0">
-                <a:solidFill>
-                  <a:srgbClr val="64748B"/>
-                </a:solidFill>
-                <a:latin typeface="Calibri"/>
-              </a:rPr>
-              <a:t>Car parks (territory-wide)</a:t>
-            </a:r>
-          </a:p>
-        </p:txBody>
-      </p:sp>
-      <p:sp>
-        <p:nvSpPr>
-          <p:cNvPr id="10" name="Rounded Rectangle 9"/>
+            <a:pPr marL="228600" indent="-228600">
+              <a:buFont typeface="Arial"/>
+              <a:buChar char="•"/>
+              <a:spcAft>
+                <a:spcPts val="600"/>
+              </a:spcAft>
+            </a:pPr>
+            <a:r>
+              <a:rPr sz="1500" b="0">
+                <a:solidFill>
+                  <a:srgbClr val="0F172A"/>
+                </a:solidFill>
+                <a:latin typeface="Calibri"/>
+              </a:rPr>
+              <a:t>Same park × hour × weekday mean</a:t>
+            </a:r>
+          </a:p>
+          <a:p>
+            <a:pPr marL="228600" indent="-228600">
+              <a:buFont typeface="Arial"/>
+              <a:buChar char="•"/>
+              <a:spcAft>
+                <a:spcPts val="600"/>
+              </a:spcAft>
+            </a:pPr>
+            <a:r>
+              <a:rPr sz="1500" b="0">
+                <a:solidFill>
+                  <a:srgbClr val="0F172A"/>
+                </a:solidFill>
+                <a:latin typeface="Calibri"/>
+              </a:rPr>
+              <a:t>Built from 365-day history</a:t>
+            </a:r>
+          </a:p>
+          <a:p>
+            <a:pPr marL="228600" indent="-228600">
+              <a:buFont typeface="Arial"/>
+              <a:buChar char="•"/>
+              <a:spcAft>
+                <a:spcPts val="600"/>
+              </a:spcAft>
+            </a:pPr>
+            <a:r>
+              <a:rPr sz="1500" b="0">
+                <a:solidFill>
+                  <a:srgbClr val="0F172A"/>
+                </a:solidFill>
+                <a:latin typeface="Calibri"/>
+              </a:rPr>
+              <a:t>Strong, interpretable reference</a:t>
+            </a:r>
+          </a:p>
+        </p:txBody>
+      </p:sp>
+      <p:sp>
+        <p:nvSpPr>
+          <p:cNvPr id="11" name="Rounded Rectangle 10"/>
           <p:cNvSpPr/>
           <p:nvPr/>
         </p:nvSpPr>
         <p:spPr>
           <a:xfrm>
-            <a:off x="3383280" y="1188720"/>
-            <a:ext cx="2743200" cy="1554480"/>
+            <a:off x="4297680" y="3611880"/>
+            <a:ext cx="3657600" cy="2743200"/>
           </a:xfrm>
           <a:prstGeom prst="roundRect">
             <a:avLst/>
@@ -5690,14 +5588,14 @@
       </p:sp>
       <p:sp>
         <p:nvSpPr>
-          <p:cNvPr id="11" name="TextBox 10"/>
+          <p:cNvPr id="12" name="TextBox 11"/>
           <p:cNvSpPr txBox="1"/>
           <p:nvPr/>
         </p:nvSpPr>
         <p:spPr>
           <a:xfrm>
-            <a:off x="3566160" y="1508760"/>
-            <a:ext cx="2377440" cy="548640"/>
+            <a:off x="4480560" y="3794760"/>
+            <a:ext cx="3291840" cy="320040"/>
           </a:xfrm>
           <a:prstGeom prst="rect">
             <a:avLst/>
@@ -5712,27 +5610,27 @@
           <a:p>
             <a:pPr algn="ctr"/>
             <a:r>
-              <a:rPr sz="3000" b="1">
+              <a:rPr sz="2000" b="1">
                 <a:solidFill>
                   <a:srgbClr val="0D9488"/>
                 </a:solidFill>
                 <a:latin typeface="Calibri"/>
               </a:rPr>
-              <a:t>~18</a:t>
-            </a:r>
-          </a:p>
-        </p:txBody>
-      </p:sp>
-      <p:sp>
-        <p:nvSpPr>
-          <p:cNvPr id="12" name="TextBox 11"/>
+              <a:t>Machine Learning models</a:t>
+            </a:r>
+          </a:p>
+        </p:txBody>
+      </p:sp>
+      <p:sp>
+        <p:nvSpPr>
+          <p:cNvPr id="13" name="TextBox 12"/>
           <p:cNvSpPr txBox="1"/>
           <p:nvPr/>
         </p:nvSpPr>
         <p:spPr>
           <a:xfrm>
-            <a:off x="3566160" y="2148840"/>
-            <a:ext cx="2377440" cy="411480"/>
+            <a:off x="4480560" y="4251960"/>
+            <a:ext cx="3291840" cy="1828800"/>
           </a:xfrm>
           <a:prstGeom prst="rect">
             <a:avLst/>
@@ -5745,29 +5643,71 @@
           </a:bodyPr>
           <a:lstStyle/>
           <a:p>
-            <a:pPr algn="ctr"/>
-            <a:r>
-              <a:rPr sz="1400" b="0">
-                <a:solidFill>
-                  <a:srgbClr val="64748B"/>
-                </a:solidFill>
-                <a:latin typeface="Calibri"/>
-              </a:rPr>
-              <a:t>HK districts covered</a:t>
-            </a:r>
-          </a:p>
-        </p:txBody>
-      </p:sp>
-      <p:sp>
-        <p:nvSpPr>
-          <p:cNvPr id="13" name="Rounded Rectangle 12"/>
+            <a:pPr marL="228600" indent="-228600">
+              <a:buFont typeface="Arial"/>
+              <a:buChar char="•"/>
+              <a:spcAft>
+                <a:spcPts val="600"/>
+              </a:spcAft>
+            </a:pPr>
+            <a:r>
+              <a:rPr sz="1500" b="0">
+                <a:solidFill>
+                  <a:srgbClr val="0F172A"/>
+                </a:solidFill>
+                <a:latin typeface="Calibri"/>
+              </a:rPr>
+              <a:t>Gradient Boosting Regressor → vacancy count</a:t>
+            </a:r>
+          </a:p>
+          <a:p>
+            <a:pPr marL="228600" indent="-228600">
+              <a:buFont typeface="Arial"/>
+              <a:buChar char="•"/>
+              <a:spcAft>
+                <a:spcPts val="600"/>
+              </a:spcAft>
+            </a:pPr>
+            <a:r>
+              <a:rPr sz="1500" b="0">
+                <a:solidFill>
+                  <a:srgbClr val="0F172A"/>
+                </a:solidFill>
+                <a:latin typeface="Calibri"/>
+              </a:rPr>
+              <a:t>Gradient Boosting Classifier → has_vacancy</a:t>
+            </a:r>
+          </a:p>
+          <a:p>
+            <a:pPr marL="228600" indent="-228600">
+              <a:buFont typeface="Arial"/>
+              <a:buChar char="•"/>
+              <a:spcAft>
+                <a:spcPts val="600"/>
+              </a:spcAft>
+            </a:pPr>
+            <a:r>
+              <a:rPr sz="1500" b="0">
+                <a:solidFill>
+                  <a:srgbClr val="0F172A"/>
+                </a:solidFill>
+                <a:latin typeface="Calibri"/>
+              </a:rPr>
+              <a:t>Time-based 70/30 train/test</a:t>
+            </a:r>
+          </a:p>
+        </p:txBody>
+      </p:sp>
+      <p:sp>
+        <p:nvSpPr>
+          <p:cNvPr id="14" name="Rounded Rectangle 13"/>
           <p:cNvSpPr/>
           <p:nvPr/>
         </p:nvSpPr>
         <p:spPr>
           <a:xfrm>
-            <a:off x="457200" y="3017520"/>
-            <a:ext cx="2743200" cy="1554480"/>
+            <a:off x="8138160" y="3611880"/>
+            <a:ext cx="3657600" cy="2743200"/>
           </a:xfrm>
           <a:prstGeom prst="roundRect">
             <a:avLst/>
@@ -5805,14 +5745,14 @@
       </p:sp>
       <p:sp>
         <p:nvSpPr>
-          <p:cNvPr id="14" name="TextBox 13"/>
+          <p:cNvPr id="15" name="TextBox 14"/>
           <p:cNvSpPr txBox="1"/>
           <p:nvPr/>
         </p:nvSpPr>
         <p:spPr>
           <a:xfrm>
-            <a:off x="640080" y="3337560"/>
-            <a:ext cx="2377440" cy="548640"/>
+            <a:off x="8321040" y="3794760"/>
+            <a:ext cx="3291840" cy="320040"/>
           </a:xfrm>
           <a:prstGeom prst="rect">
             <a:avLst/>
@@ -5827,27 +5767,27 @@
           <a:p>
             <a:pPr algn="ctr"/>
             <a:r>
-              <a:rPr sz="3000" b="1">
+              <a:rPr sz="2000" b="1">
                 <a:solidFill>
                   <a:srgbClr val="0D9488"/>
                 </a:solidFill>
                 <a:latin typeface="Calibri"/>
               </a:rPr>
-              <a:t>~34.9k</a:t>
-            </a:r>
-          </a:p>
-        </p:txBody>
-      </p:sp>
-      <p:sp>
-        <p:nvSpPr>
-          <p:cNvPr id="15" name="TextBox 14"/>
+              <a:t>GenAI product</a:t>
+            </a:r>
+          </a:p>
+        </p:txBody>
+      </p:sp>
+      <p:sp>
+        <p:nvSpPr>
+          <p:cNvPr id="16" name="TextBox 15"/>
           <p:cNvSpPr txBox="1"/>
           <p:nvPr/>
         </p:nvSpPr>
         <p:spPr>
           <a:xfrm>
-            <a:off x="640080" y="3977639"/>
-            <a:ext cx="2377440" cy="411480"/>
+            <a:off x="8321040" y="4251960"/>
+            <a:ext cx="3291840" cy="1828800"/>
           </a:xfrm>
           <a:prstGeom prst="rect">
             <a:avLst/>
@@ -5860,39 +5800,101 @@
           </a:bodyPr>
           <a:lstStyle/>
           <a:p>
-            <a:pPr algn="ctr"/>
-            <a:r>
-              <a:rPr sz="1400" b="0">
-                <a:solidFill>
-                  <a:srgbClr val="64748B"/>
-                </a:solidFill>
-                <a:latin typeface="Calibri"/>
-              </a:rPr>
-              <a:t>Historical snapshots (1 yr)</a:t>
-            </a:r>
-          </a:p>
-        </p:txBody>
-      </p:sp>
-      <p:sp>
-        <p:nvSpPr>
-          <p:cNvPr id="16" name="Rounded Rectangle 15"/>
+            <a:pPr marL="228600" indent="-228600">
+              <a:buFont typeface="Arial"/>
+              <a:buChar char="•"/>
+              <a:spcAft>
+                <a:spcPts val="600"/>
+              </a:spcAft>
+            </a:pPr>
+            <a:r>
+              <a:rPr sz="1500" b="0">
+                <a:solidFill>
+                  <a:srgbClr val="0F172A"/>
+                </a:solidFill>
+                <a:latin typeface="Calibri"/>
+              </a:rPr>
+              <a:t>DeepSeek → Natural Language intent parsing</a:t>
+            </a:r>
+          </a:p>
+          <a:p>
+            <a:pPr marL="228600" indent="-228600">
+              <a:buFont typeface="Arial"/>
+              <a:buChar char="•"/>
+              <a:spcAft>
+                <a:spcPts val="600"/>
+              </a:spcAft>
+            </a:pPr>
+            <a:r>
+              <a:rPr sz="1500" b="0">
+                <a:solidFill>
+                  <a:srgbClr val="0F172A"/>
+                </a:solidFill>
+                <a:latin typeface="Calibri"/>
+              </a:rPr>
+              <a:t>Google Geocoding + Maps JavaScript</a:t>
+            </a:r>
+          </a:p>
+          <a:p>
+            <a:pPr marL="228600" indent="-228600">
+              <a:buFont typeface="Arial"/>
+              <a:buChar char="•"/>
+              <a:spcAft>
+                <a:spcPts val="600"/>
+              </a:spcAft>
+            </a:pPr>
+            <a:r>
+              <a:rPr sz="1500" b="0">
+                <a:solidFill>
+                  <a:srgbClr val="0F172A"/>
+                </a:solidFill>
+                <a:latin typeface="Calibri"/>
+              </a:rPr>
+              <a:t>Google Speech-to-Text + Edge Text-to-Speech (Cantonese)</a:t>
+            </a:r>
+          </a:p>
+          <a:p>
+            <a:pPr marL="228600" indent="-228600">
+              <a:buFont typeface="Arial"/>
+              <a:buChar char="•"/>
+              <a:spcAft>
+                <a:spcPts val="600"/>
+              </a:spcAft>
+            </a:pPr>
+            <a:r>
+              <a:rPr sz="1500" b="0">
+                <a:solidFill>
+                  <a:srgbClr val="0F172A"/>
+                </a:solidFill>
+                <a:latin typeface="Calibri"/>
+              </a:rPr>
+              <a:t>Nearby ranking + recommendations</a:t>
+            </a:r>
+          </a:p>
+        </p:txBody>
+      </p:sp>
+      <p:sp>
+        <p:nvSpPr>
+          <p:cNvPr id="17" name="Rounded Rectangle 16"/>
           <p:cNvSpPr/>
           <p:nvPr/>
         </p:nvSpPr>
         <p:spPr>
           <a:xfrm>
-            <a:off x="3383280" y="3017520"/>
-            <a:ext cx="2743200" cy="1554480"/>
+            <a:off x="289407" y="1097280"/>
+            <a:ext cx="2176272" cy="1965960"/>
           </a:xfrm>
           <a:prstGeom prst="roundRect">
-            <a:avLst/>
+            <a:avLst>
+              <a:gd name="adj" fmla="val 18000"/>
+            </a:avLst>
           </a:prstGeom>
           <a:solidFill>
-            <a:srgbClr val="F0FDFA"/>
+            <a:srgbClr val="E8F4F8"/>
           </a:solidFill>
           <a:ln w="19050">
             <a:solidFill>
-              <a:srgbClr val="0D9488"/>
+              <a:srgbClr val="7BA3B5"/>
             </a:solidFill>
           </a:ln>
         </p:spPr>
@@ -5911,104 +5913,77 @@
           </a:fontRef>
         </p:style>
         <p:txBody>
-          <a:bodyPr rtlCol="0" anchor="ctr"/>
-          <a:lstStyle/>
-          <a:p>
-            <a:pPr algn="ctr"/>
-          </a:p>
-        </p:txBody>
-      </p:sp>
-      <p:sp>
-        <p:nvSpPr>
-          <p:cNvPr id="17" name="TextBox 16"/>
-          <p:cNvSpPr txBox="1"/>
-          <p:nvPr/>
-        </p:nvSpPr>
-        <p:spPr>
-          <a:xfrm>
-            <a:off x="3566160" y="3337560"/>
-            <a:ext cx="2377440" cy="548640"/>
-          </a:xfrm>
-          <a:prstGeom prst="rect">
-            <a:avLst/>
-          </a:prstGeom>
-          <a:noFill/>
-        </p:spPr>
-        <p:txBody>
-          <a:bodyPr wrap="square">
-            <a:spAutoFit/>
-          </a:bodyPr>
-          <a:lstStyle/>
-          <a:p>
-            <a:pPr algn="ctr"/>
-            <a:r>
-              <a:rPr sz="3000" b="1">
-                <a:solidFill>
-                  <a:srgbClr val="0D9488"/>
-                </a:solidFill>
-                <a:latin typeface="Calibri"/>
-              </a:rPr>
-              <a:t>~10 min</a:t>
-            </a:r>
-          </a:p>
-        </p:txBody>
-      </p:sp>
-      <p:sp>
-        <p:nvSpPr>
-          <p:cNvPr id="18" name="TextBox 17"/>
-          <p:cNvSpPr txBox="1"/>
-          <p:nvPr/>
-        </p:nvSpPr>
-        <p:spPr>
-          <a:xfrm>
-            <a:off x="3566160" y="3977639"/>
-            <a:ext cx="2377440" cy="411480"/>
-          </a:xfrm>
-          <a:prstGeom prst="rect">
-            <a:avLst/>
-          </a:prstGeom>
-          <a:noFill/>
-        </p:spPr>
-        <p:txBody>
-          <a:bodyPr wrap="square">
-            <a:spAutoFit/>
-          </a:bodyPr>
-          <a:lstStyle/>
-          <a:p>
-            <a:pPr algn="ctr"/>
-            <a:r>
-              <a:rPr sz="1400" b="0">
-                <a:solidFill>
-                  <a:srgbClr val="64748B"/>
-                </a:solidFill>
-                <a:latin typeface="Calibri"/>
-              </a:rPr>
-              <a:t>Collection cadence</a:t>
-            </a:r>
-          </a:p>
-        </p:txBody>
-      </p:sp>
-      <p:sp>
-        <p:nvSpPr>
-          <p:cNvPr id="19" name="Rounded Rectangle 18"/>
+          <a:bodyPr rtlCol="0" anchor="ctr" wrap="square" lIns="109728" tIns="128016" bIns="91440"/>
+          <a:lstStyle/>
+          <a:p>
+            <a:pPr algn="ctr"/>
+            <a:r>
+              <a:rPr sz="1800" b="1">
+                <a:solidFill>
+                  <a:srgbClr val="1A3A4A"/>
+                </a:solidFill>
+                <a:latin typeface="Calibri"/>
+              </a:rPr>
+              <a:t>Data sources</a:t>
+            </a:r>
+          </a:p>
+          <a:p>
+            <a:r>
+              <a:rPr sz="400"/>
+              <a:t/>
+            </a:r>
+          </a:p>
+          <a:p>
+            <a:pPr algn="l" marL="228600" indent="-228600">
+              <a:buFont typeface="Arial"/>
+              <a:buChar char="•"/>
+            </a:pPr>
+            <a:r>
+              <a:rPr sz="1300" b="0">
+                <a:solidFill>
+                  <a:srgbClr val="0F172A"/>
+                </a:solidFill>
+                <a:latin typeface="Calibri"/>
+              </a:rPr>
+              <a:t>Transport Department Vacancy API</a:t>
+            </a:r>
+          </a:p>
+          <a:p>
+            <a:pPr algn="l" marL="228600" indent="-228600">
+              <a:buFont typeface="Arial"/>
+              <a:buChar char="•"/>
+            </a:pPr>
+            <a:r>
+              <a:rPr sz="1300" b="0">
+                <a:solidFill>
+                  <a:srgbClr val="0F172A"/>
+                </a:solidFill>
+                <a:latin typeface="Calibri"/>
+              </a:rPr>
+              <a:t>Hong Kong Observatory Weather</a:t>
+            </a:r>
+          </a:p>
+        </p:txBody>
+      </p:sp>
+      <p:sp>
+        <p:nvSpPr>
+          <p:cNvPr id="18" name="Right Arrow 17"/>
           <p:cNvSpPr/>
           <p:nvPr/>
         </p:nvSpPr>
         <p:spPr>
           <a:xfrm>
-            <a:off x="6400800" y="1188720"/>
-            <a:ext cx="5303520" cy="4572000"/>
-          </a:xfrm>
-          <a:prstGeom prst="roundRect">
+            <a:off x="2483967" y="2007108"/>
+            <a:ext cx="146304" cy="146304"/>
+          </a:xfrm>
+          <a:prstGeom prst="rightArrow">
             <a:avLst/>
           </a:prstGeom>
           <a:solidFill>
-            <a:srgbClr val="F0FDFA"/>
+            <a:srgbClr val="7BA3B5"/>
           </a:solidFill>
-          <a:ln w="19050">
-            <a:solidFill>
-              <a:srgbClr val="0D9488"/>
-            </a:solidFill>
+          <a:ln w="0">
+            <a:noFill/>
           </a:ln>
         </p:spPr>
         <p:style>
@@ -6035,154 +6010,482 @@
       </p:sp>
       <p:sp>
         <p:nvSpPr>
-          <p:cNvPr id="20" name="TextBox 19"/>
-          <p:cNvSpPr txBox="1"/>
-          <p:nvPr/>
-        </p:nvSpPr>
-        <p:spPr>
-          <a:xfrm>
-            <a:off x="6583680" y="1371600"/>
-            <a:ext cx="4937760" cy="365760"/>
-          </a:xfrm>
-          <a:prstGeom prst="rect">
-            <a:avLst/>
-          </a:prstGeom>
-          <a:noFill/>
-        </p:spPr>
-        <p:txBody>
-          <a:bodyPr wrap="square">
-            <a:spAutoFit/>
-          </a:bodyPr>
-          <a:lstStyle/>
-          <a:p>
-            <a:pPr algn="ctr"/>
-            <a:r>
-              <a:rPr sz="2000" b="1">
-                <a:solidFill>
-                  <a:srgbClr val="0D9488"/>
-                </a:solidFill>
-                <a:latin typeface="Calibri"/>
-              </a:rPr>
-              <a:t>Sources &amp; characteristics</a:t>
-            </a:r>
-          </a:p>
-        </p:txBody>
-      </p:sp>
-      <p:sp>
-        <p:nvSpPr>
-          <p:cNvPr id="21" name="TextBox 20"/>
-          <p:cNvSpPr txBox="1"/>
-          <p:nvPr/>
-        </p:nvSpPr>
-        <p:spPr>
-          <a:xfrm>
-            <a:off x="6583680" y="1920240"/>
-            <a:ext cx="4937760" cy="3566160"/>
-          </a:xfrm>
-          <a:prstGeom prst="rect">
-            <a:avLst/>
-          </a:prstGeom>
-          <a:noFill/>
-        </p:spPr>
-        <p:txBody>
-          <a:bodyPr wrap="square">
-            <a:spAutoFit/>
-          </a:bodyPr>
-          <a:lstStyle/>
-          <a:p>
-            <a:pPr>
-              <a:spcAft>
-                <a:spcPts val="600"/>
-              </a:spcAft>
+          <p:cNvPr id="19" name="Rounded Rectangle 18"/>
+          <p:cNvSpPr/>
+          <p:nvPr/>
+        </p:nvSpPr>
+        <p:spPr>
+          <a:xfrm>
+            <a:off x="2648559" y="1097280"/>
+            <a:ext cx="2176272" cy="1965960"/>
+          </a:xfrm>
+          <a:prstGeom prst="roundRect">
+            <a:avLst>
+              <a:gd name="adj" fmla="val 18000"/>
+            </a:avLst>
+          </a:prstGeom>
+          <a:solidFill>
+            <a:srgbClr val="E8F4F8"/>
+          </a:solidFill>
+          <a:ln w="19050">
+            <a:solidFill>
+              <a:srgbClr val="7BA3B5"/>
+            </a:solidFill>
+          </a:ln>
+        </p:spPr>
+        <p:style>
+          <a:lnRef idx="1">
+            <a:schemeClr val="accent1"/>
+          </a:lnRef>
+          <a:fillRef idx="3">
+            <a:schemeClr val="accent1"/>
+          </a:fillRef>
+          <a:effectRef idx="2">
+            <a:schemeClr val="accent1"/>
+          </a:effectRef>
+          <a:fontRef idx="minor">
+            <a:schemeClr val="lt1"/>
+          </a:fontRef>
+        </p:style>
+        <p:txBody>
+          <a:bodyPr rtlCol="0" anchor="ctr" wrap="square" lIns="109728" tIns="128016" bIns="91440"/>
+          <a:lstStyle/>
+          <a:p>
+            <a:pPr algn="ctr"/>
+            <a:r>
+              <a:rPr sz="1800" b="1">
+                <a:solidFill>
+                  <a:srgbClr val="1A3A4A"/>
+                </a:solidFill>
+                <a:latin typeface="Calibri"/>
+              </a:rPr>
+              <a:t>Extract, Transform, Load</a:t>
+            </a:r>
+          </a:p>
+          <a:p>
+            <a:r>
+              <a:rPr sz="400"/>
+              <a:t/>
+            </a:r>
+          </a:p>
+          <a:p>
+            <a:pPr algn="l" marL="228600" indent="-228600">
+              <a:buFont typeface="Arial"/>
+              <a:buChar char="•"/>
             </a:pPr>
             <a:r>
-              <a:rPr sz="1600" b="0">
+              <a:rPr sz="1300" b="0">
                 <a:solidFill>
                   <a:srgbClr val="0F172A"/>
                 </a:solidFill>
                 <a:latin typeface="Calibri"/>
               </a:rPr>
-              <a:t>• Transport Department Parking Vacancy API (privateCar)</a:t>
-            </a:r>
-          </a:p>
-          <a:p>
-            <a:pPr>
-              <a:spcAft>
-                <a:spcPts val="600"/>
-              </a:spcAft>
+              <a:t>Collect &amp; join every ~10 min</a:t>
+            </a:r>
+          </a:p>
+        </p:txBody>
+      </p:sp>
+      <p:sp>
+        <p:nvSpPr>
+          <p:cNvPr id="20" name="Right Arrow 19"/>
+          <p:cNvSpPr/>
+          <p:nvPr/>
+        </p:nvSpPr>
+        <p:spPr>
+          <a:xfrm>
+            <a:off x="4843119" y="2007108"/>
+            <a:ext cx="146304" cy="146304"/>
+          </a:xfrm>
+          <a:prstGeom prst="rightArrow">
+            <a:avLst/>
+          </a:prstGeom>
+          <a:solidFill>
+            <a:srgbClr val="7BA3B5"/>
+          </a:solidFill>
+          <a:ln w="0">
+            <a:noFill/>
+          </a:ln>
+        </p:spPr>
+        <p:style>
+          <a:lnRef idx="1">
+            <a:schemeClr val="accent1"/>
+          </a:lnRef>
+          <a:fillRef idx="3">
+            <a:schemeClr val="accent1"/>
+          </a:fillRef>
+          <a:effectRef idx="2">
+            <a:schemeClr val="accent1"/>
+          </a:effectRef>
+          <a:fontRef idx="minor">
+            <a:schemeClr val="lt1"/>
+          </a:fontRef>
+        </p:style>
+        <p:txBody>
+          <a:bodyPr rtlCol="0" anchor="ctr"/>
+          <a:lstStyle/>
+          <a:p>
+            <a:pPr algn="ctr"/>
+          </a:p>
+        </p:txBody>
+      </p:sp>
+      <p:sp>
+        <p:nvSpPr>
+          <p:cNvPr id="21" name="Rounded Rectangle 20"/>
+          <p:cNvSpPr/>
+          <p:nvPr/>
+        </p:nvSpPr>
+        <p:spPr>
+          <a:xfrm>
+            <a:off x="5007711" y="1097280"/>
+            <a:ext cx="2176272" cy="1965960"/>
+          </a:xfrm>
+          <a:prstGeom prst="roundRect">
+            <a:avLst>
+              <a:gd name="adj" fmla="val 18000"/>
+            </a:avLst>
+          </a:prstGeom>
+          <a:solidFill>
+            <a:srgbClr val="E8F4F8"/>
+          </a:solidFill>
+          <a:ln w="19050">
+            <a:solidFill>
+              <a:srgbClr val="7BA3B5"/>
+            </a:solidFill>
+          </a:ln>
+        </p:spPr>
+        <p:style>
+          <a:lnRef idx="1">
+            <a:schemeClr val="accent1"/>
+          </a:lnRef>
+          <a:fillRef idx="3">
+            <a:schemeClr val="accent1"/>
+          </a:fillRef>
+          <a:effectRef idx="2">
+            <a:schemeClr val="accent1"/>
+          </a:effectRef>
+          <a:fontRef idx="minor">
+            <a:schemeClr val="lt1"/>
+          </a:fontRef>
+        </p:style>
+        <p:txBody>
+          <a:bodyPr rtlCol="0" anchor="ctr" wrap="square" lIns="109728" tIns="128016" bIns="91440"/>
+          <a:lstStyle/>
+          <a:p>
+            <a:pPr algn="ctr"/>
+            <a:r>
+              <a:rPr sz="1800" b="1">
+                <a:solidFill>
+                  <a:srgbClr val="1A3A4A"/>
+                </a:solidFill>
+                <a:latin typeface="Calibri"/>
+              </a:rPr>
+              <a:t>Store</a:t>
+            </a:r>
+          </a:p>
+          <a:p>
+            <a:r>
+              <a:rPr sz="400"/>
+              <a:t/>
+            </a:r>
+          </a:p>
+          <a:p>
+            <a:pPr algn="l" marL="228600" indent="-228600">
+              <a:buFont typeface="Arial"/>
+              <a:buChar char="•"/>
             </a:pPr>
             <a:r>
-              <a:rPr sz="1600" b="0">
+              <a:rPr sz="1300" b="0">
                 <a:solidFill>
                   <a:srgbClr val="0F172A"/>
                 </a:solidFill>
                 <a:latin typeface="Calibri"/>
               </a:rPr>
-              <a:t>• HKO weather snapshots (temperature, humidity, …)</a:t>
-            </a:r>
-          </a:p>
-          <a:p>
-            <a:pPr>
-              <a:spcAft>
-                <a:spcPts val="600"/>
-              </a:spcAft>
+              <a:t>SQLite / Supabase API</a:t>
+            </a:r>
+          </a:p>
+        </p:txBody>
+      </p:sp>
+      <p:sp>
+        <p:nvSpPr>
+          <p:cNvPr id="22" name="Right Arrow 21"/>
+          <p:cNvSpPr/>
+          <p:nvPr/>
+        </p:nvSpPr>
+        <p:spPr>
+          <a:xfrm>
+            <a:off x="7202271" y="2007108"/>
+            <a:ext cx="146304" cy="146304"/>
+          </a:xfrm>
+          <a:prstGeom prst="rightArrow">
+            <a:avLst/>
+          </a:prstGeom>
+          <a:solidFill>
+            <a:srgbClr val="7BA3B5"/>
+          </a:solidFill>
+          <a:ln w="0">
+            <a:noFill/>
+          </a:ln>
+        </p:spPr>
+        <p:style>
+          <a:lnRef idx="1">
+            <a:schemeClr val="accent1"/>
+          </a:lnRef>
+          <a:fillRef idx="3">
+            <a:schemeClr val="accent1"/>
+          </a:fillRef>
+          <a:effectRef idx="2">
+            <a:schemeClr val="accent1"/>
+          </a:effectRef>
+          <a:fontRef idx="minor">
+            <a:schemeClr val="lt1"/>
+          </a:fontRef>
+        </p:style>
+        <p:txBody>
+          <a:bodyPr rtlCol="0" anchor="ctr"/>
+          <a:lstStyle/>
+          <a:p>
+            <a:pPr algn="ctr"/>
+          </a:p>
+        </p:txBody>
+      </p:sp>
+      <p:sp>
+        <p:nvSpPr>
+          <p:cNvPr id="23" name="Rounded Rectangle 22"/>
+          <p:cNvSpPr/>
+          <p:nvPr/>
+        </p:nvSpPr>
+        <p:spPr>
+          <a:xfrm>
+            <a:off x="7366863" y="1097280"/>
+            <a:ext cx="2176272" cy="1965960"/>
+          </a:xfrm>
+          <a:prstGeom prst="roundRect">
+            <a:avLst>
+              <a:gd name="adj" fmla="val 18000"/>
+            </a:avLst>
+          </a:prstGeom>
+          <a:solidFill>
+            <a:srgbClr val="E8F4F8"/>
+          </a:solidFill>
+          <a:ln w="19050">
+            <a:solidFill>
+              <a:srgbClr val="7BA3B5"/>
+            </a:solidFill>
+          </a:ln>
+        </p:spPr>
+        <p:style>
+          <a:lnRef idx="1">
+            <a:schemeClr val="accent1"/>
+          </a:lnRef>
+          <a:fillRef idx="3">
+            <a:schemeClr val="accent1"/>
+          </a:fillRef>
+          <a:effectRef idx="2">
+            <a:schemeClr val="accent1"/>
+          </a:effectRef>
+          <a:fontRef idx="minor">
+            <a:schemeClr val="lt1"/>
+          </a:fontRef>
+        </p:style>
+        <p:txBody>
+          <a:bodyPr rtlCol="0" anchor="ctr" wrap="square" lIns="109728" tIns="128016" bIns="91440"/>
+          <a:lstStyle/>
+          <a:p>
+            <a:pPr algn="ctr"/>
+            <a:r>
+              <a:rPr sz="1800" b="1">
+                <a:solidFill>
+                  <a:srgbClr val="1A3A4A"/>
+                </a:solidFill>
+                <a:latin typeface="Calibri"/>
+              </a:rPr>
+              <a:t>Models</a:t>
+            </a:r>
+          </a:p>
+          <a:p>
+            <a:r>
+              <a:rPr sz="400"/>
+              <a:t/>
+            </a:r>
+          </a:p>
+          <a:p>
+            <a:pPr algn="l" marL="228600" indent="-228600">
+              <a:buFont typeface="Arial"/>
+              <a:buChar char="•"/>
             </a:pPr>
             <a:r>
-              <a:rPr sz="1600" b="0">
+              <a:rPr sz="1300" b="0">
                 <a:solidFill>
                   <a:srgbClr val="0F172A"/>
                 </a:solidFill>
                 <a:latin typeface="Calibri"/>
               </a:rPr>
-              <a:t>• Baseline summary from ~1 year historical ZIPs</a:t>
-            </a:r>
-          </a:p>
-          <a:p>
-            <a:pPr>
-              <a:spcAft>
-                <a:spcPts val="600"/>
-              </a:spcAft>
+              <a:t>Baseline + Gradient Boosting</a:t>
+            </a:r>
+          </a:p>
+        </p:txBody>
+      </p:sp>
+      <p:sp>
+        <p:nvSpPr>
+          <p:cNvPr id="24" name="Right Arrow 23"/>
+          <p:cNvSpPr/>
+          <p:nvPr/>
+        </p:nvSpPr>
+        <p:spPr>
+          <a:xfrm>
+            <a:off x="9561423" y="2007108"/>
+            <a:ext cx="146304" cy="146304"/>
+          </a:xfrm>
+          <a:prstGeom prst="rightArrow">
+            <a:avLst/>
+          </a:prstGeom>
+          <a:solidFill>
+            <a:srgbClr val="7BA3B5"/>
+          </a:solidFill>
+          <a:ln w="0">
+            <a:noFill/>
+          </a:ln>
+        </p:spPr>
+        <p:style>
+          <a:lnRef idx="1">
+            <a:schemeClr val="accent1"/>
+          </a:lnRef>
+          <a:fillRef idx="3">
+            <a:schemeClr val="accent1"/>
+          </a:fillRef>
+          <a:effectRef idx="2">
+            <a:schemeClr val="accent1"/>
+          </a:effectRef>
+          <a:fontRef idx="minor">
+            <a:schemeClr val="lt1"/>
+          </a:fontRef>
+        </p:style>
+        <p:txBody>
+          <a:bodyPr rtlCol="0" anchor="ctr"/>
+          <a:lstStyle/>
+          <a:p>
+            <a:pPr algn="ctr"/>
+          </a:p>
+        </p:txBody>
+      </p:sp>
+      <p:sp>
+        <p:nvSpPr>
+          <p:cNvPr id="25" name="Rounded Rectangle 24"/>
+          <p:cNvSpPr/>
+          <p:nvPr/>
+        </p:nvSpPr>
+        <p:spPr>
+          <a:xfrm>
+            <a:off x="9726015" y="1097280"/>
+            <a:ext cx="2176272" cy="1965960"/>
+          </a:xfrm>
+          <a:prstGeom prst="roundRect">
+            <a:avLst>
+              <a:gd name="adj" fmla="val 18000"/>
+            </a:avLst>
+          </a:prstGeom>
+          <a:solidFill>
+            <a:srgbClr val="E8F4F8"/>
+          </a:solidFill>
+          <a:ln w="19050">
+            <a:solidFill>
+              <a:srgbClr val="7BA3B5"/>
+            </a:solidFill>
+          </a:ln>
+        </p:spPr>
+        <p:style>
+          <a:lnRef idx="1">
+            <a:schemeClr val="accent1"/>
+          </a:lnRef>
+          <a:fillRef idx="3">
+            <a:schemeClr val="accent1"/>
+          </a:fillRef>
+          <a:effectRef idx="2">
+            <a:schemeClr val="accent1"/>
+          </a:effectRef>
+          <a:fontRef idx="minor">
+            <a:schemeClr val="lt1"/>
+          </a:fontRef>
+        </p:style>
+        <p:txBody>
+          <a:bodyPr rtlCol="0" anchor="ctr" wrap="square" lIns="109728" tIns="128016" bIns="91440"/>
+          <a:lstStyle/>
+          <a:p>
+            <a:pPr algn="ctr"/>
+            <a:r>
+              <a:rPr sz="1800" b="1">
+                <a:solidFill>
+                  <a:srgbClr val="1A3A4A"/>
+                </a:solidFill>
+                <a:latin typeface="Calibri"/>
+              </a:rPr>
+              <a:t>Streamlit App</a:t>
+            </a:r>
+          </a:p>
+          <a:p>
+            <a:r>
+              <a:rPr sz="400"/>
+              <a:t/>
+            </a:r>
+          </a:p>
+          <a:p>
+            <a:pPr algn="l" marL="228600" indent="-228600">
+              <a:buFont typeface="Arial"/>
+              <a:buChar char="•"/>
             </a:pPr>
             <a:r>
-              <a:rPr sz="1600" b="0">
+              <a:rPr sz="1300" b="0">
                 <a:solidFill>
                   <a:srgbClr val="0F172A"/>
                 </a:solidFill>
                 <a:latin typeface="Calibri"/>
               </a:rPr>
-              <a:t>• Features: hour, DOW, weekend, park/district, temperature</a:t>
-            </a:r>
-          </a:p>
-          <a:p>
-            <a:pPr>
-              <a:spcAft>
-                <a:spcPts val="600"/>
-              </a:spcAft>
+              <a:t>DeepSeek</a:t>
+            </a:r>
+          </a:p>
+          <a:p>
+            <a:pPr algn="l" marL="228600" indent="-228600">
+              <a:buFont typeface="Arial"/>
+              <a:buChar char="•"/>
             </a:pPr>
             <a:r>
-              <a:rPr sz="1600" b="0">
+              <a:rPr sz="1300" b="0">
                 <a:solidFill>
                   <a:srgbClr val="0F172A"/>
                 </a:solidFill>
                 <a:latin typeface="Calibri"/>
               </a:rPr>
-              <a:t>• Preprocessing: filter vacancy≥0, time join, encode IDs</a:t>
-            </a:r>
-          </a:p>
-          <a:p>
-            <a:pPr>
-              <a:spcAft>
-                <a:spcPts val="600"/>
-              </a:spcAft>
+              <a:t>Maps</a:t>
+            </a:r>
+          </a:p>
+          <a:p>
+            <a:pPr algn="l" marL="228600" indent="-228600">
+              <a:buFont typeface="Arial"/>
+              <a:buChar char="•"/>
             </a:pPr>
             <a:r>
-              <a:rPr sz="1600" b="0">
+              <a:rPr sz="1300" b="0">
                 <a:solidFill>
                   <a:srgbClr val="0F172A"/>
                 </a:solidFill>
                 <a:latin typeface="Calibri"/>
               </a:rPr>
-              <a:t>• Scope note: car-park vacancy, not on-street meters</a:t>
+              <a:t>Speech-to-Text</a:t>
+            </a:r>
+          </a:p>
+          <a:p>
+            <a:pPr algn="l" marL="228600" indent="-228600">
+              <a:buFont typeface="Arial"/>
+              <a:buChar char="•"/>
+            </a:pPr>
+            <a:r>
+              <a:rPr sz="1300" b="0">
+                <a:solidFill>
+                  <a:srgbClr val="0F172A"/>
+                </a:solidFill>
+                <a:latin typeface="Calibri"/>
+              </a:rPr>
+              <a:t>Edge Text-to-Speech</a:t>
             </a:r>
           </a:p>
         </p:txBody>
@@ -6355,7 +6658,7 @@
                 </a:solidFill>
                 <a:latin typeface="Calibri"/>
               </a:rPr>
-              <a:t>5 / 11</a:t>
+              <a:t>5 / 10</a:t>
             </a:r>
           </a:p>
         </p:txBody>
@@ -6389,45 +6692,21 @@
                 </a:solidFill>
                 <a:latin typeface="Calibri"/>
               </a:rPr>
-              <a:t>Methodology &amp; Pipeline</a:t>
-            </a:r>
-          </a:p>
-        </p:txBody>
-      </p:sp>
-      <p:pic>
-        <p:nvPicPr>
-          <p:cNvPr id="7" name="Picture 6" descr="pipeline.png"/>
-          <p:cNvPicPr>
-            <a:picLocks noChangeAspect="1"/>
-          </p:cNvPicPr>
-          <p:nvPr/>
-        </p:nvPicPr>
-        <p:blipFill>
-          <a:blip r:embed="rId2"/>
-          <a:stretch>
-            <a:fillRect/>
-          </a:stretch>
-        </p:blipFill>
-        <p:spPr>
-          <a:xfrm>
-            <a:off x="548640" y="1051560"/>
-            <a:ext cx="11064240" cy="3140366"/>
-          </a:xfrm>
-          <a:prstGeom prst="rect">
-            <a:avLst/>
-          </a:prstGeom>
-        </p:spPr>
-      </p:pic>
-      <p:sp>
-        <p:nvSpPr>
-          <p:cNvPr id="8" name="Rounded Rectangle 7"/>
+              <a:t>Technical Skills Demonstrated</a:t>
+            </a:r>
+          </a:p>
+        </p:txBody>
+      </p:sp>
+      <p:sp>
+        <p:nvSpPr>
+          <p:cNvPr id="7" name="Rounded Rectangle 6"/>
           <p:cNvSpPr/>
           <p:nvPr/>
         </p:nvSpPr>
         <p:spPr>
           <a:xfrm>
-            <a:off x="457200" y="3200400"/>
-            <a:ext cx="3657600" cy="2743200"/>
+            <a:off x="457200" y="1280160"/>
+            <a:ext cx="2743200" cy="1920240"/>
           </a:xfrm>
           <a:prstGeom prst="roundRect">
             <a:avLst/>
@@ -6465,14 +6744,39 @@
       </p:sp>
       <p:sp>
         <p:nvSpPr>
+          <p:cNvPr id="8" name="TextBox 7"/>
+          <p:cNvSpPr txBox="1"/>
+          <p:nvPr/>
+        </p:nvSpPr>
+        <p:spPr>
+          <a:xfrm>
+            <a:off x="640080" y="1417320"/>
+            <a:ext cx="2377440" cy="0"/>
+          </a:xfrm>
+          <a:prstGeom prst="rect">
+            <a:avLst/>
+          </a:prstGeom>
+          <a:noFill/>
+        </p:spPr>
+        <p:txBody>
+          <a:bodyPr wrap="square"/>
+          <a:lstStyle/>
+          <a:p>
+            <a:pPr algn="ctr"/>
+            <a:endParaRPr/>
+          </a:p>
+        </p:txBody>
+      </p:sp>
+      <p:sp>
+        <p:nvSpPr>
           <p:cNvPr id="9" name="TextBox 8"/>
           <p:cNvSpPr txBox="1"/>
           <p:nvPr/>
         </p:nvSpPr>
         <p:spPr>
           <a:xfrm>
-            <a:off x="640080" y="3383280"/>
-            <a:ext cx="3291840" cy="320040"/>
+            <a:off x="640080" y="1417320"/>
+            <a:ext cx="2377440" cy="1645920"/>
           </a:xfrm>
           <a:prstGeom prst="rect">
             <a:avLst/>
@@ -6480,105 +6784,86 @@
           <a:noFill/>
         </p:spPr>
         <p:txBody>
-          <a:bodyPr wrap="square">
+          <a:bodyPr wrap="square" anchor="ctr">
             <a:spAutoFit/>
           </a:bodyPr>
           <a:lstStyle/>
           <a:p>
-            <a:pPr algn="ctr"/>
-            <a:r>
-              <a:rPr sz="2000" b="1">
-                <a:solidFill>
-                  <a:srgbClr val="0D9488"/>
-                </a:solidFill>
-                <a:latin typeface="Calibri"/>
-              </a:rPr>
-              <a:t>Baseline</a:t>
-            </a:r>
-          </a:p>
-        </p:txBody>
-      </p:sp>
-      <p:sp>
-        <p:nvSpPr>
-          <p:cNvPr id="10" name="TextBox 9"/>
-          <p:cNvSpPr txBox="1"/>
-          <p:nvPr/>
-        </p:nvSpPr>
-        <p:spPr>
-          <a:xfrm>
-            <a:off x="640080" y="3840480"/>
-            <a:ext cx="3291840" cy="1828800"/>
-          </a:xfrm>
-          <a:prstGeom prst="rect">
-            <a:avLst/>
-          </a:prstGeom>
-          <a:noFill/>
-        </p:spPr>
-        <p:txBody>
-          <a:bodyPr wrap="square">
-            <a:spAutoFit/>
-          </a:bodyPr>
-          <a:lstStyle/>
-          <a:p>
-            <a:pPr>
+            <a:pPr algn="ctr">
               <a:spcAft>
-                <a:spcPts val="600"/>
+                <a:spcPts val="1000"/>
               </a:spcAft>
             </a:pPr>
             <a:r>
-              <a:rPr sz="1500" b="0">
-                <a:solidFill>
-                  <a:srgbClr val="0F172A"/>
-                </a:solidFill>
-                <a:latin typeface="Calibri"/>
-              </a:rPr>
-              <a:t>• Same park × hour × weekday mean</a:t>
-            </a:r>
-          </a:p>
-          <a:p>
-            <a:pPr>
-              <a:spcAft>
-                <a:spcPts val="600"/>
-              </a:spcAft>
-            </a:pPr>
-            <a:r>
-              <a:rPr sz="1500" b="0">
-                <a:solidFill>
-                  <a:srgbClr val="0F172A"/>
-                </a:solidFill>
-                <a:latin typeface="Calibri"/>
-              </a:rPr>
-              <a:t>• Built from 365-day history</a:t>
-            </a:r>
-          </a:p>
-          <a:p>
-            <a:pPr>
-              <a:spcAft>
-                <a:spcPts val="600"/>
-              </a:spcAft>
-            </a:pPr>
-            <a:r>
-              <a:rPr sz="1500" b="0">
-                <a:solidFill>
-                  <a:srgbClr val="0F172A"/>
-                </a:solidFill>
-                <a:latin typeface="Calibri"/>
-              </a:rPr>
-              <a:t>• Strong, interpretable reference</a:t>
-            </a:r>
-          </a:p>
-        </p:txBody>
-      </p:sp>
-      <p:sp>
-        <p:nvSpPr>
-          <p:cNvPr id="11" name="Rounded Rectangle 10"/>
+              <a:rPr sz="2200" b="1">
+                <a:solidFill>
+                  <a:srgbClr val="0D9488"/>
+                </a:solidFill>
+                <a:latin typeface="Calibri"/>
+              </a:rPr>
+              <a:t>Python</a:t>
+            </a:r>
+          </a:p>
+          <a:p>
+            <a:pPr algn="ctr"/>
+            <a:r>
+              <a:rPr sz="1300" b="0">
+                <a:solidFill>
+                  <a:srgbClr val="64748B"/>
+                </a:solidFill>
+                <a:latin typeface="Calibri"/>
+              </a:rPr>
+              <a:t>pandas</a:t>
+            </a:r>
+          </a:p>
+          <a:p>
+            <a:pPr algn="ctr"/>
+            <a:r>
+              <a:rPr sz="1300" b="0">
+                <a:solidFill>
+                  <a:srgbClr val="64748B"/>
+                </a:solidFill>
+                <a:latin typeface="Calibri"/>
+              </a:rPr>
+              <a:t>scikit-learn</a:t>
+            </a:r>
+          </a:p>
+          <a:p>
+            <a:pPr algn="ctr"/>
+            <a:r>
+              <a:rPr sz="1300" b="0">
+                <a:solidFill>
+                  <a:srgbClr val="64748B"/>
+                </a:solidFill>
+                <a:latin typeface="Calibri"/>
+              </a:rPr>
+              <a:t>Streamlit</a:t>
+            </a:r>
+          </a:p>
+          <a:p>
+            <a:pPr algn="ctr"/>
+            <a:r>
+              <a:rPr sz="1300" b="0">
+                <a:solidFill>
+                  <a:srgbClr val="64748B"/>
+                </a:solidFill>
+                <a:latin typeface="Calibri"/>
+              </a:rPr>
+              <a:t>httpx</a:t>
+            </a:r>
+          </a:p>
+        </p:txBody>
+      </p:sp>
+      <p:sp>
+        <p:nvSpPr>
+          <p:cNvPr id="10" name="Rounded Rectangle 9"/>
           <p:cNvSpPr/>
           <p:nvPr/>
         </p:nvSpPr>
         <p:spPr>
           <a:xfrm>
-            <a:off x="4297680" y="3200400"/>
-            <a:ext cx="3657600" cy="2743200"/>
+            <a:off x="3337560" y="1280160"/>
+            <a:ext cx="2743200" cy="1920240"/>
           </a:xfrm>
           <a:prstGeom prst="roundRect">
             <a:avLst/>
@@ -6616,14 +6901,39 @@
       </p:sp>
       <p:sp>
         <p:nvSpPr>
+          <p:cNvPr id="11" name="TextBox 10"/>
+          <p:cNvSpPr txBox="1"/>
+          <p:nvPr/>
+        </p:nvSpPr>
+        <p:spPr>
+          <a:xfrm>
+            <a:off x="3520440" y="1417320"/>
+            <a:ext cx="2377440" cy="0"/>
+          </a:xfrm>
+          <a:prstGeom prst="rect">
+            <a:avLst/>
+          </a:prstGeom>
+          <a:noFill/>
+        </p:spPr>
+        <p:txBody>
+          <a:bodyPr wrap="square"/>
+          <a:lstStyle/>
+          <a:p>
+            <a:pPr algn="ctr"/>
+            <a:endParaRPr/>
+          </a:p>
+        </p:txBody>
+      </p:sp>
+      <p:sp>
+        <p:nvSpPr>
           <p:cNvPr id="12" name="TextBox 11"/>
           <p:cNvSpPr txBox="1"/>
           <p:nvPr/>
         </p:nvSpPr>
         <p:spPr>
           <a:xfrm>
-            <a:off x="4480560" y="3383280"/>
-            <a:ext cx="3291840" cy="320040"/>
+            <a:off x="3520440" y="1417320"/>
+            <a:ext cx="2377440" cy="1645920"/>
           </a:xfrm>
           <a:prstGeom prst="rect">
             <a:avLst/>
@@ -6631,105 +6941,62 @@
           <a:noFill/>
         </p:spPr>
         <p:txBody>
-          <a:bodyPr wrap="square">
+          <a:bodyPr wrap="square" anchor="ctr">
             <a:spAutoFit/>
           </a:bodyPr>
           <a:lstStyle/>
           <a:p>
-            <a:pPr algn="ctr"/>
-            <a:r>
-              <a:rPr sz="2000" b="1">
-                <a:solidFill>
-                  <a:srgbClr val="0D9488"/>
-                </a:solidFill>
-                <a:latin typeface="Calibri"/>
-              </a:rPr>
-              <a:t>ML models</a:t>
-            </a:r>
-          </a:p>
-        </p:txBody>
-      </p:sp>
-      <p:sp>
-        <p:nvSpPr>
-          <p:cNvPr id="13" name="TextBox 12"/>
-          <p:cNvSpPr txBox="1"/>
-          <p:nvPr/>
-        </p:nvSpPr>
-        <p:spPr>
-          <a:xfrm>
-            <a:off x="4480560" y="3840480"/>
-            <a:ext cx="3291840" cy="1828800"/>
-          </a:xfrm>
-          <a:prstGeom prst="rect">
-            <a:avLst/>
-          </a:prstGeom>
-          <a:noFill/>
-        </p:spPr>
-        <p:txBody>
-          <a:bodyPr wrap="square">
-            <a:spAutoFit/>
-          </a:bodyPr>
-          <a:lstStyle/>
-          <a:p>
-            <a:pPr>
+            <a:pPr algn="ctr">
               <a:spcAft>
-                <a:spcPts val="600"/>
+                <a:spcPts val="1000"/>
               </a:spcAft>
             </a:pPr>
             <a:r>
-              <a:rPr sz="1500" b="0">
-                <a:solidFill>
-                  <a:srgbClr val="0F172A"/>
-                </a:solidFill>
-                <a:latin typeface="Calibri"/>
-              </a:rPr>
-              <a:t>• GB Regressor → vacancy count</a:t>
-            </a:r>
-          </a:p>
-          <a:p>
-            <a:pPr>
-              <a:spcAft>
-                <a:spcPts val="600"/>
-              </a:spcAft>
-            </a:pPr>
-            <a:r>
-              <a:rPr sz="1500" b="0">
-                <a:solidFill>
-                  <a:srgbClr val="0F172A"/>
-                </a:solidFill>
-                <a:latin typeface="Calibri"/>
-              </a:rPr>
-              <a:t>• GB Classifier → has_vacancy</a:t>
-            </a:r>
-          </a:p>
-          <a:p>
-            <a:pPr>
-              <a:spcAft>
-                <a:spcPts val="600"/>
-              </a:spcAft>
-            </a:pPr>
-            <a:r>
-              <a:rPr sz="1500" b="0">
-                <a:solidFill>
-                  <a:srgbClr val="0F172A"/>
-                </a:solidFill>
-                <a:latin typeface="Calibri"/>
-              </a:rPr>
-              <a:t>• Time-based 70/30 train/test</a:t>
-            </a:r>
-          </a:p>
-        </p:txBody>
-      </p:sp>
-      <p:sp>
-        <p:nvSpPr>
-          <p:cNvPr id="14" name="Rounded Rectangle 13"/>
+              <a:rPr sz="2200" b="1">
+                <a:solidFill>
+                  <a:srgbClr val="0D9488"/>
+                </a:solidFill>
+                <a:latin typeface="Calibri"/>
+              </a:rPr>
+              <a:t>SQL / DB</a:t>
+            </a:r>
+          </a:p>
+          <a:p>
+            <a:pPr algn="ctr"/>
+            <a:r>
+              <a:rPr sz="1300" b="0">
+                <a:solidFill>
+                  <a:srgbClr val="64748B"/>
+                </a:solidFill>
+                <a:latin typeface="Calibri"/>
+              </a:rPr>
+              <a:t>SQLite</a:t>
+            </a:r>
+          </a:p>
+          <a:p>
+            <a:pPr algn="ctr"/>
+            <a:r>
+              <a:rPr sz="1300" b="0">
+                <a:solidFill>
+                  <a:srgbClr val="64748B"/>
+                </a:solidFill>
+                <a:latin typeface="Calibri"/>
+              </a:rPr>
+              <a:t>Supabase Postgres</a:t>
+            </a:r>
+          </a:p>
+        </p:txBody>
+      </p:sp>
+      <p:sp>
+        <p:nvSpPr>
+          <p:cNvPr id="13" name="Rounded Rectangle 12"/>
           <p:cNvSpPr/>
           <p:nvPr/>
         </p:nvSpPr>
         <p:spPr>
           <a:xfrm>
-            <a:off x="8138160" y="3200400"/>
-            <a:ext cx="3657600" cy="2743200"/>
+            <a:off x="6217920" y="1280160"/>
+            <a:ext cx="2743200" cy="1920240"/>
           </a:xfrm>
           <a:prstGeom prst="roundRect">
             <a:avLst/>
@@ -6767,14 +7034,147 @@
       </p:sp>
       <p:sp>
         <p:nvSpPr>
+          <p:cNvPr id="14" name="TextBox 13"/>
+          <p:cNvSpPr txBox="1"/>
+          <p:nvPr/>
+        </p:nvSpPr>
+        <p:spPr>
+          <a:xfrm>
+            <a:off x="6400800" y="1417320"/>
+            <a:ext cx="2377440" cy="0"/>
+          </a:xfrm>
+          <a:prstGeom prst="rect">
+            <a:avLst/>
+          </a:prstGeom>
+          <a:noFill/>
+        </p:spPr>
+        <p:txBody>
+          <a:bodyPr wrap="square"/>
+          <a:lstStyle/>
+          <a:p>
+            <a:pPr algn="ctr"/>
+            <a:endParaRPr/>
+          </a:p>
+        </p:txBody>
+      </p:sp>
+      <p:sp>
+        <p:nvSpPr>
           <p:cNvPr id="15" name="TextBox 14"/>
           <p:cNvSpPr txBox="1"/>
           <p:nvPr/>
         </p:nvSpPr>
         <p:spPr>
           <a:xfrm>
-            <a:off x="8321040" y="3383280"/>
-            <a:ext cx="3291840" cy="320040"/>
+            <a:off x="6400800" y="1417320"/>
+            <a:ext cx="2377440" cy="1645920"/>
+          </a:xfrm>
+          <a:prstGeom prst="rect">
+            <a:avLst/>
+          </a:prstGeom>
+          <a:noFill/>
+        </p:spPr>
+        <p:txBody>
+          <a:bodyPr wrap="none" anchor="ctr">
+            <a:spAutoFit/>
+          </a:bodyPr>
+          <a:lstStyle/>
+          <a:p>
+            <a:pPr algn="ctr">
+              <a:spcAft>
+                <a:spcPts val="1000"/>
+              </a:spcAft>
+            </a:pPr>
+            <a:r>
+              <a:rPr sz="1700" b="1">
+                <a:solidFill>
+                  <a:srgbClr val="0D9488"/>
+                </a:solidFill>
+                <a:latin typeface="Calibri"/>
+              </a:rPr>
+              <a:t>Extract–Transform–Load</a:t>
+            </a:r>
+          </a:p>
+          <a:p>
+            <a:pPr algn="ctr"/>
+            <a:r>
+              <a:rPr sz="1300" b="0">
+                <a:solidFill>
+                  <a:srgbClr val="64748B"/>
+                </a:solidFill>
+                <a:latin typeface="Calibri"/>
+              </a:rPr>
+              <a:t>Scheduled collection</a:t>
+            </a:r>
+          </a:p>
+          <a:p>
+            <a:pPr algn="ctr"/>
+            <a:r>
+              <a:rPr sz="1300" b="0">
+                <a:solidFill>
+                  <a:srgbClr val="64748B"/>
+                </a:solidFill>
+                <a:latin typeface="Calibri"/>
+              </a:rPr>
+              <a:t>Migration scripts</a:t>
+            </a:r>
+          </a:p>
+        </p:txBody>
+      </p:sp>
+      <p:sp>
+        <p:nvSpPr>
+          <p:cNvPr id="16" name="Rounded Rectangle 15"/>
+          <p:cNvSpPr/>
+          <p:nvPr/>
+        </p:nvSpPr>
+        <p:spPr>
+          <a:xfrm>
+            <a:off x="9098280" y="1280160"/>
+            <a:ext cx="2743200" cy="1920240"/>
+          </a:xfrm>
+          <a:prstGeom prst="roundRect">
+            <a:avLst/>
+          </a:prstGeom>
+          <a:solidFill>
+            <a:srgbClr val="F0FDFA"/>
+          </a:solidFill>
+          <a:ln w="19050">
+            <a:solidFill>
+              <a:srgbClr val="0D9488"/>
+            </a:solidFill>
+          </a:ln>
+        </p:spPr>
+        <p:style>
+          <a:lnRef idx="1">
+            <a:schemeClr val="accent1"/>
+          </a:lnRef>
+          <a:fillRef idx="3">
+            <a:schemeClr val="accent1"/>
+          </a:fillRef>
+          <a:effectRef idx="2">
+            <a:schemeClr val="accent1"/>
+          </a:effectRef>
+          <a:fontRef idx="minor">
+            <a:schemeClr val="lt1"/>
+          </a:fontRef>
+        </p:style>
+        <p:txBody>
+          <a:bodyPr rtlCol="0" anchor="ctr"/>
+          <a:lstStyle/>
+          <a:p>
+            <a:pPr algn="ctr"/>
+          </a:p>
+        </p:txBody>
+      </p:sp>
+      <p:sp>
+        <p:nvSpPr>
+          <p:cNvPr id="17" name="TextBox 16"/>
+          <p:cNvSpPr txBox="1"/>
+          <p:nvPr/>
+        </p:nvSpPr>
+        <p:spPr>
+          <a:xfrm>
+            <a:off x="9281159" y="1645919"/>
+            <a:ext cx="2377440" cy="411480"/>
           </a:xfrm>
           <a:prstGeom prst="rect">
             <a:avLst/>
@@ -6788,28 +7188,25 @@
           <a:lstStyle/>
           <a:p>
             <a:pPr algn="ctr"/>
-            <a:r>
-              <a:rPr sz="2000" b="1">
-                <a:solidFill>
-                  <a:srgbClr val="0D9488"/>
-                </a:solidFill>
-                <a:latin typeface="Calibri"/>
-              </a:rPr>
-              <a:t>GenAI product</a:t>
-            </a:r>
-          </a:p>
-        </p:txBody>
-      </p:sp>
-      <p:sp>
-        <p:nvSpPr>
-          <p:cNvPr id="16" name="TextBox 15"/>
+            <a:endParaRPr sz="2200" b="1">
+              <a:solidFill>
+                <a:srgbClr val="0D9488"/>
+              </a:solidFill>
+              <a:latin typeface="Calibri"/>
+            </a:endParaRPr>
+          </a:p>
+        </p:txBody>
+      </p:sp>
+      <p:sp>
+        <p:nvSpPr>
+          <p:cNvPr id="18" name="TextBox 17"/>
           <p:cNvSpPr txBox="1"/>
           <p:nvPr/>
         </p:nvSpPr>
         <p:spPr>
           <a:xfrm>
-            <a:off x="8321040" y="3840480"/>
-            <a:ext cx="3291840" cy="1828800"/>
+            <a:off x="9281160" y="1417320"/>
+            <a:ext cx="2377440" cy="1645920"/>
           </a:xfrm>
           <a:prstGeom prst="rect">
             <a:avLst/>
@@ -6817,56 +7214,648 @@
           <a:noFill/>
         </p:spPr>
         <p:txBody>
-          <a:bodyPr wrap="square">
+          <a:bodyPr wrap="square" anchor="ctr">
             <a:spAutoFit/>
           </a:bodyPr>
           <a:lstStyle/>
           <a:p>
-            <a:pPr>
+            <a:pPr algn="ctr"/>
+            <a:r>
+              <a:rPr sz="2200" b="1">
+                <a:solidFill>
+                  <a:srgbClr val="0D9488"/>
+                </a:solidFill>
+                <a:latin typeface="Calibri"/>
+              </a:rPr>
+              <a:t>API</a:t>
+            </a:r>
+          </a:p>
+          <a:p>
+            <a:pPr algn="ctr"/>
+            <a:r>
+              <a:rPr sz="1300" b="0">
+                <a:solidFill>
+                  <a:srgbClr val="64748B"/>
+                </a:solidFill>
+                <a:latin typeface="Calibri"/>
+              </a:rPr>
+              <a:t>Transport Department Vacancy</a:t>
+            </a:r>
+          </a:p>
+          <a:p>
+            <a:pPr algn="ctr"/>
+            <a:r>
+              <a:rPr sz="1300" b="0">
+                <a:solidFill>
+                  <a:srgbClr val="64748B"/>
+                </a:solidFill>
+                <a:latin typeface="Calibri"/>
+              </a:rPr>
+              <a:t>Hong Kong Observatory</a:t>
+            </a:r>
+          </a:p>
+          <a:p>
+            <a:pPr algn="ctr"/>
+            <a:r>
+              <a:rPr sz="1300" b="0">
+                <a:solidFill>
+                  <a:srgbClr val="64748B"/>
+                </a:solidFill>
+                <a:latin typeface="Calibri"/>
+              </a:rPr>
+              <a:t>Supabase</a:t>
+            </a:r>
+          </a:p>
+          <a:p>
+            <a:pPr algn="ctr"/>
+            <a:r>
+              <a:rPr sz="1300" b="0">
+                <a:solidFill>
+                  <a:srgbClr val="64748B"/>
+                </a:solidFill>
+                <a:latin typeface="Calibri"/>
+              </a:rPr>
+              <a:t>DeepSeek</a:t>
+            </a:r>
+          </a:p>
+          <a:p>
+            <a:pPr algn="ctr"/>
+            <a:r>
+              <a:rPr sz="1300" b="0">
+                <a:solidFill>
+                  <a:srgbClr val="64748B"/>
+                </a:solidFill>
+                <a:latin typeface="Calibri"/>
+              </a:rPr>
+              <a:t>Google Maps / Geocoding</a:t>
+            </a:r>
+          </a:p>
+          <a:p>
+            <a:pPr algn="ctr"/>
+            <a:r>
+              <a:rPr sz="1300" b="0">
+                <a:solidFill>
+                  <a:srgbClr val="64748B"/>
+                </a:solidFill>
+                <a:latin typeface="Calibri"/>
+              </a:rPr>
+              <a:t>Google Speech-to-Text</a:t>
+            </a:r>
+          </a:p>
+          <a:p>
+            <a:pPr algn="ctr"/>
+            <a:r>
+              <a:rPr sz="1300" b="0">
+                <a:solidFill>
+                  <a:srgbClr val="64748B"/>
+                </a:solidFill>
+                <a:latin typeface="Calibri"/>
+              </a:rPr>
+              <a:t>Edge Text-to-Speech</a:t>
+            </a:r>
+          </a:p>
+        </p:txBody>
+      </p:sp>
+      <p:sp>
+        <p:nvSpPr>
+          <p:cNvPr id="19" name="Rounded Rectangle 18"/>
+          <p:cNvSpPr/>
+          <p:nvPr/>
+        </p:nvSpPr>
+        <p:spPr>
+          <a:xfrm>
+            <a:off x="457200" y="3566160"/>
+            <a:ext cx="2743200" cy="1920240"/>
+          </a:xfrm>
+          <a:prstGeom prst="roundRect">
+            <a:avLst/>
+          </a:prstGeom>
+          <a:solidFill>
+            <a:srgbClr val="F0FDFA"/>
+          </a:solidFill>
+          <a:ln w="19050">
+            <a:solidFill>
+              <a:srgbClr val="0D9488"/>
+            </a:solidFill>
+          </a:ln>
+        </p:spPr>
+        <p:style>
+          <a:lnRef idx="1">
+            <a:schemeClr val="accent1"/>
+          </a:lnRef>
+          <a:fillRef idx="3">
+            <a:schemeClr val="accent1"/>
+          </a:fillRef>
+          <a:effectRef idx="2">
+            <a:schemeClr val="accent1"/>
+          </a:effectRef>
+          <a:fontRef idx="minor">
+            <a:schemeClr val="lt1"/>
+          </a:fontRef>
+        </p:style>
+        <p:txBody>
+          <a:bodyPr rtlCol="0" anchor="ctr"/>
+          <a:lstStyle/>
+          <a:p>
+            <a:pPr algn="ctr"/>
+          </a:p>
+        </p:txBody>
+      </p:sp>
+      <p:sp>
+        <p:nvSpPr>
+          <p:cNvPr id="20" name="TextBox 19"/>
+          <p:cNvSpPr txBox="1"/>
+          <p:nvPr/>
+        </p:nvSpPr>
+        <p:spPr>
+          <a:xfrm>
+            <a:off x="640080" y="3703320"/>
+            <a:ext cx="2377440" cy="0"/>
+          </a:xfrm>
+          <a:prstGeom prst="rect">
+            <a:avLst/>
+          </a:prstGeom>
+          <a:noFill/>
+        </p:spPr>
+        <p:txBody>
+          <a:bodyPr wrap="square"/>
+          <a:lstStyle/>
+          <a:p>
+            <a:pPr algn="ctr"/>
+            <a:endParaRPr/>
+          </a:p>
+        </p:txBody>
+      </p:sp>
+      <p:sp>
+        <p:nvSpPr>
+          <p:cNvPr id="21" name="TextBox 20"/>
+          <p:cNvSpPr txBox="1"/>
+          <p:nvPr/>
+        </p:nvSpPr>
+        <p:spPr>
+          <a:xfrm>
+            <a:off x="640080" y="3703320"/>
+            <a:ext cx="2377440" cy="1645920"/>
+          </a:xfrm>
+          <a:prstGeom prst="rect">
+            <a:avLst/>
+          </a:prstGeom>
+          <a:noFill/>
+        </p:spPr>
+        <p:txBody>
+          <a:bodyPr wrap="square" anchor="ctr">
+            <a:spAutoFit/>
+          </a:bodyPr>
+          <a:lstStyle/>
+          <a:p>
+            <a:pPr algn="ctr">
               <a:spcAft>
-                <a:spcPts val="600"/>
+                <a:spcPts val="1000"/>
               </a:spcAft>
             </a:pPr>
             <a:r>
-              <a:rPr sz="1500" b="0">
-                <a:solidFill>
-                  <a:srgbClr val="0F172A"/>
-                </a:solidFill>
-                <a:latin typeface="Calibri"/>
-              </a:rPr>
-              <a:t>• NL / voice query → intent</a:t>
-            </a:r>
-          </a:p>
-          <a:p>
-            <a:pPr>
+              <a:rPr sz="2200" b="1">
+                <a:solidFill>
+                  <a:srgbClr val="0D9488"/>
+                </a:solidFill>
+                <a:latin typeface="Calibri"/>
+              </a:rPr>
+              <a:t>EDA / Viz</a:t>
+            </a:r>
+          </a:p>
+          <a:p>
+            <a:pPr algn="ctr"/>
+            <a:r>
+              <a:rPr sz="1300" b="0">
+                <a:solidFill>
+                  <a:srgbClr val="64748B"/>
+                </a:solidFill>
+                <a:latin typeface="Calibri"/>
+              </a:rPr>
+              <a:t>Vacancy-rate heatmaps</a:t>
+            </a:r>
+          </a:p>
+          <a:p>
+            <a:pPr algn="ctr"/>
+            <a:r>
+              <a:rPr sz="1300" b="0">
+                <a:solidFill>
+                  <a:srgbClr val="64748B"/>
+                </a:solidFill>
+                <a:latin typeface="Calibri"/>
+              </a:rPr>
+              <a:t>Live vs baseline</a:t>
+            </a:r>
+          </a:p>
+        </p:txBody>
+      </p:sp>
+      <p:sp>
+        <p:nvSpPr>
+          <p:cNvPr id="22" name="Rounded Rectangle 21"/>
+          <p:cNvSpPr/>
+          <p:nvPr/>
+        </p:nvSpPr>
+        <p:spPr>
+          <a:xfrm>
+            <a:off x="3337560" y="3566160"/>
+            <a:ext cx="2743200" cy="1920240"/>
+          </a:xfrm>
+          <a:prstGeom prst="roundRect">
+            <a:avLst/>
+          </a:prstGeom>
+          <a:solidFill>
+            <a:srgbClr val="F0FDFA"/>
+          </a:solidFill>
+          <a:ln w="19050">
+            <a:solidFill>
+              <a:srgbClr val="0D9488"/>
+            </a:solidFill>
+          </a:ln>
+        </p:spPr>
+        <p:style>
+          <a:lnRef idx="1">
+            <a:schemeClr val="accent1"/>
+          </a:lnRef>
+          <a:fillRef idx="3">
+            <a:schemeClr val="accent1"/>
+          </a:fillRef>
+          <a:effectRef idx="2">
+            <a:schemeClr val="accent1"/>
+          </a:effectRef>
+          <a:fontRef idx="minor">
+            <a:schemeClr val="lt1"/>
+          </a:fontRef>
+        </p:style>
+        <p:txBody>
+          <a:bodyPr rtlCol="0" anchor="ctr"/>
+          <a:lstStyle/>
+          <a:p>
+            <a:pPr algn="ctr"/>
+          </a:p>
+        </p:txBody>
+      </p:sp>
+      <p:sp>
+        <p:nvSpPr>
+          <p:cNvPr id="23" name="TextBox 22"/>
+          <p:cNvSpPr txBox="1"/>
+          <p:nvPr/>
+        </p:nvSpPr>
+        <p:spPr>
+          <a:xfrm>
+            <a:off x="3520440" y="3703320"/>
+            <a:ext cx="2377440" cy="0"/>
+          </a:xfrm>
+          <a:prstGeom prst="rect">
+            <a:avLst/>
+          </a:prstGeom>
+          <a:noFill/>
+        </p:spPr>
+        <p:txBody>
+          <a:bodyPr wrap="square"/>
+          <a:lstStyle/>
+          <a:p>
+            <a:pPr algn="ctr"/>
+            <a:endParaRPr/>
+          </a:p>
+        </p:txBody>
+      </p:sp>
+      <p:sp>
+        <p:nvSpPr>
+          <p:cNvPr id="24" name="TextBox 23"/>
+          <p:cNvSpPr txBox="1"/>
+          <p:nvPr/>
+        </p:nvSpPr>
+        <p:spPr>
+          <a:xfrm>
+            <a:off x="3520440" y="3703320"/>
+            <a:ext cx="2377440" cy="1645920"/>
+          </a:xfrm>
+          <a:prstGeom prst="rect">
+            <a:avLst/>
+          </a:prstGeom>
+          <a:noFill/>
+        </p:spPr>
+        <p:txBody>
+          <a:bodyPr wrap="square" anchor="ctr">
+            <a:spAutoFit/>
+          </a:bodyPr>
+          <a:lstStyle/>
+          <a:p>
+            <a:pPr algn="ctr">
               <a:spcAft>
-                <a:spcPts val="600"/>
+                <a:spcPts val="1000"/>
               </a:spcAft>
             </a:pPr>
             <a:r>
-              <a:rPr sz="1500" b="0">
-                <a:solidFill>
-                  <a:srgbClr val="0F172A"/>
-                </a:solidFill>
-                <a:latin typeface="Calibri"/>
-              </a:rPr>
-              <a:t>• Nearby ranking + map</a:t>
-            </a:r>
-          </a:p>
-          <a:p>
-            <a:pPr>
+              <a:rPr sz="2200" b="1">
+                <a:solidFill>
+                  <a:srgbClr val="0D9488"/>
+                </a:solidFill>
+                <a:latin typeface="Calibri"/>
+              </a:rPr>
+              <a:t>Machine Learning</a:t>
+            </a:r>
+          </a:p>
+          <a:p>
+            <a:pPr algn="ctr"/>
+            <a:r>
+              <a:rPr sz="1300" b="0">
+                <a:solidFill>
+                  <a:srgbClr val="64748B"/>
+                </a:solidFill>
+                <a:latin typeface="Calibri"/>
+              </a:rPr>
+              <a:t>Baseline</a:t>
+            </a:r>
+          </a:p>
+          <a:p>
+            <a:pPr algn="ctr"/>
+            <a:r>
+              <a:rPr sz="1300" b="0">
+                <a:solidFill>
+                  <a:srgbClr val="64748B"/>
+                </a:solidFill>
+                <a:latin typeface="Calibri"/>
+              </a:rPr>
+              <a:t>Gradient Boosting</a:t>
+            </a:r>
+          </a:p>
+        </p:txBody>
+      </p:sp>
+      <p:sp>
+        <p:nvSpPr>
+          <p:cNvPr id="25" name="Rounded Rectangle 24"/>
+          <p:cNvSpPr/>
+          <p:nvPr/>
+        </p:nvSpPr>
+        <p:spPr>
+          <a:xfrm>
+            <a:off x="6217920" y="3566160"/>
+            <a:ext cx="2743200" cy="1920240"/>
+          </a:xfrm>
+          <a:prstGeom prst="roundRect">
+            <a:avLst/>
+          </a:prstGeom>
+          <a:solidFill>
+            <a:srgbClr val="F0FDFA"/>
+          </a:solidFill>
+          <a:ln w="19050">
+            <a:solidFill>
+              <a:srgbClr val="0D9488"/>
+            </a:solidFill>
+          </a:ln>
+        </p:spPr>
+        <p:style>
+          <a:lnRef idx="1">
+            <a:schemeClr val="accent1"/>
+          </a:lnRef>
+          <a:fillRef idx="3">
+            <a:schemeClr val="accent1"/>
+          </a:fillRef>
+          <a:effectRef idx="2">
+            <a:schemeClr val="accent1"/>
+          </a:effectRef>
+          <a:fontRef idx="minor">
+            <a:schemeClr val="lt1"/>
+          </a:fontRef>
+        </p:style>
+        <p:txBody>
+          <a:bodyPr rtlCol="0" anchor="ctr"/>
+          <a:lstStyle/>
+          <a:p>
+            <a:pPr algn="ctr"/>
+          </a:p>
+        </p:txBody>
+      </p:sp>
+      <p:sp>
+        <p:nvSpPr>
+          <p:cNvPr id="26" name="TextBox 25"/>
+          <p:cNvSpPr txBox="1"/>
+          <p:nvPr/>
+        </p:nvSpPr>
+        <p:spPr>
+          <a:xfrm>
+            <a:off x="6400800" y="3703320"/>
+            <a:ext cx="2377440" cy="0"/>
+          </a:xfrm>
+          <a:prstGeom prst="rect">
+            <a:avLst/>
+          </a:prstGeom>
+          <a:noFill/>
+        </p:spPr>
+        <p:txBody>
+          <a:bodyPr wrap="square"/>
+          <a:lstStyle/>
+          <a:p>
+            <a:pPr algn="ctr"/>
+            <a:endParaRPr/>
+          </a:p>
+        </p:txBody>
+      </p:sp>
+      <p:sp>
+        <p:nvSpPr>
+          <p:cNvPr id="27" name="TextBox 26"/>
+          <p:cNvSpPr txBox="1"/>
+          <p:nvPr/>
+        </p:nvSpPr>
+        <p:spPr>
+          <a:xfrm>
+            <a:off x="6400800" y="3703320"/>
+            <a:ext cx="2377440" cy="1645920"/>
+          </a:xfrm>
+          <a:prstGeom prst="rect">
+            <a:avLst/>
+          </a:prstGeom>
+          <a:noFill/>
+        </p:spPr>
+        <p:txBody>
+          <a:bodyPr wrap="square" anchor="ctr">
+            <a:spAutoFit/>
+          </a:bodyPr>
+          <a:lstStyle/>
+          <a:p>
+            <a:pPr algn="ctr">
               <a:spcAft>
-                <a:spcPts val="600"/>
+                <a:spcPts val="1000"/>
               </a:spcAft>
             </a:pPr>
             <a:r>
-              <a:rPr sz="1500" b="0">
-                <a:solidFill>
-                  <a:srgbClr val="0F172A"/>
-                </a:solidFill>
-                <a:latin typeface="Calibri"/>
-              </a:rPr>
-              <a:t>• Cantonese TTS recommendations</a:t>
+              <a:rPr sz="2200" b="1">
+                <a:solidFill>
+                  <a:srgbClr val="0D9488"/>
+                </a:solidFill>
+                <a:latin typeface="Calibri"/>
+              </a:rPr>
+              <a:t>GenAI</a:t>
+            </a:r>
+          </a:p>
+          <a:p>
+            <a:pPr algn="ctr"/>
+            <a:r>
+              <a:rPr sz="1300" b="0">
+                <a:solidFill>
+                  <a:srgbClr val="64748B"/>
+                </a:solidFill>
+                <a:latin typeface="Calibri"/>
+              </a:rPr>
+              <a:t>DeepSeek intent + replies</a:t>
+            </a:r>
+          </a:p>
+          <a:p>
+            <a:pPr algn="ctr"/>
+            <a:r>
+              <a:rPr sz="1300" b="0">
+                <a:solidFill>
+                  <a:srgbClr val="64748B"/>
+                </a:solidFill>
+                <a:latin typeface="Calibri"/>
+              </a:rPr>
+              <a:t>Google Speech-to-Text</a:t>
+            </a:r>
+          </a:p>
+          <a:p>
+            <a:pPr algn="ctr"/>
+            <a:r>
+              <a:rPr sz="1300" b="0">
+                <a:solidFill>
+                  <a:srgbClr val="64748B"/>
+                </a:solidFill>
+                <a:latin typeface="Calibri"/>
+              </a:rPr>
+              <a:t>Edge Text-to-Speech voice</a:t>
+            </a:r>
+          </a:p>
+        </p:txBody>
+      </p:sp>
+      <p:sp>
+        <p:nvSpPr>
+          <p:cNvPr id="28" name="Rounded Rectangle 27"/>
+          <p:cNvSpPr/>
+          <p:nvPr/>
+        </p:nvSpPr>
+        <p:spPr>
+          <a:xfrm>
+            <a:off x="9098280" y="3566160"/>
+            <a:ext cx="2743200" cy="1920240"/>
+          </a:xfrm>
+          <a:prstGeom prst="roundRect">
+            <a:avLst/>
+          </a:prstGeom>
+          <a:solidFill>
+            <a:srgbClr val="F0FDFA"/>
+          </a:solidFill>
+          <a:ln w="19050">
+            <a:solidFill>
+              <a:srgbClr val="0D9488"/>
+            </a:solidFill>
+          </a:ln>
+        </p:spPr>
+        <p:style>
+          <a:lnRef idx="1">
+            <a:schemeClr val="accent1"/>
+          </a:lnRef>
+          <a:fillRef idx="3">
+            <a:schemeClr val="accent1"/>
+          </a:fillRef>
+          <a:effectRef idx="2">
+            <a:schemeClr val="accent1"/>
+          </a:effectRef>
+          <a:fontRef idx="minor">
+            <a:schemeClr val="lt1"/>
+          </a:fontRef>
+        </p:style>
+        <p:txBody>
+          <a:bodyPr rtlCol="0" anchor="ctr"/>
+          <a:lstStyle/>
+          <a:p>
+            <a:pPr algn="ctr"/>
+          </a:p>
+        </p:txBody>
+      </p:sp>
+      <p:sp>
+        <p:nvSpPr>
+          <p:cNvPr id="29" name="TextBox 28"/>
+          <p:cNvSpPr txBox="1"/>
+          <p:nvPr/>
+        </p:nvSpPr>
+        <p:spPr>
+          <a:xfrm>
+            <a:off x="9281160" y="3703320"/>
+            <a:ext cx="2377440" cy="0"/>
+          </a:xfrm>
+          <a:prstGeom prst="rect">
+            <a:avLst/>
+          </a:prstGeom>
+          <a:noFill/>
+        </p:spPr>
+        <p:txBody>
+          <a:bodyPr wrap="square"/>
+          <a:lstStyle/>
+          <a:p>
+            <a:pPr algn="ctr"/>
+            <a:endParaRPr/>
+          </a:p>
+        </p:txBody>
+      </p:sp>
+      <p:sp>
+        <p:nvSpPr>
+          <p:cNvPr id="30" name="TextBox 29"/>
+          <p:cNvSpPr txBox="1"/>
+          <p:nvPr/>
+        </p:nvSpPr>
+        <p:spPr>
+          <a:xfrm>
+            <a:off x="9281160" y="3703320"/>
+            <a:ext cx="2377440" cy="1645920"/>
+          </a:xfrm>
+          <a:prstGeom prst="rect">
+            <a:avLst/>
+          </a:prstGeom>
+          <a:noFill/>
+        </p:spPr>
+        <p:txBody>
+          <a:bodyPr wrap="square" anchor="ctr">
+            <a:spAutoFit/>
+          </a:bodyPr>
+          <a:lstStyle/>
+          <a:p>
+            <a:pPr algn="ctr">
+              <a:spcAft>
+                <a:spcPts val="1000"/>
+              </a:spcAft>
+            </a:pPr>
+            <a:r>
+              <a:rPr sz="2200" b="1">
+                <a:solidFill>
+                  <a:srgbClr val="0D9488"/>
+                </a:solidFill>
+                <a:latin typeface="Calibri"/>
+              </a:rPr>
+              <a:t>Deploy</a:t>
+            </a:r>
+          </a:p>
+          <a:p>
+            <a:pPr algn="ctr"/>
+            <a:r>
+              <a:rPr sz="1300" b="0">
+                <a:solidFill>
+                  <a:srgbClr val="64748B"/>
+                </a:solidFill>
+                <a:latin typeface="Calibri"/>
+              </a:rPr>
+              <a:t>GitHub</a:t>
+            </a:r>
+          </a:p>
+          <a:p>
+            <a:pPr algn="ctr"/>
+            <a:r>
+              <a:rPr sz="1300" b="0">
+                <a:solidFill>
+                  <a:srgbClr val="64748B"/>
+                </a:solidFill>
+                <a:latin typeface="Calibri"/>
+              </a:rPr>
+              <a:t>Streamlit Cloud</a:t>
             </a:r>
           </a:p>
         </p:txBody>
@@ -7039,7 +8028,7 @@
                 </a:solidFill>
                 <a:latin typeface="Calibri"/>
               </a:rPr>
-              <a:t>6 / 11</a:t>
+              <a:t>6 / 10</a:t>
             </a:r>
           </a:p>
         </p:txBody>
@@ -7073,21 +8062,45 @@
                 </a:solidFill>
                 <a:latin typeface="Calibri"/>
               </a:rPr>
-              <a:t>Technical Skills Demonstrated</a:t>
-            </a:r>
-          </a:p>
-        </p:txBody>
-      </p:sp>
-      <p:sp>
-        <p:nvSpPr>
-          <p:cNvPr id="7" name="Rounded Rectangle 6"/>
+              <a:t>EDA Insights</a:t>
+            </a:r>
+          </a:p>
+        </p:txBody>
+      </p:sp>
+      <p:pic>
+        <p:nvPicPr>
+          <p:cNvPr id="7" name="Picture 6" descr="nb_chart_03.png"/>
+          <p:cNvPicPr>
+            <a:picLocks noChangeAspect="1"/>
+          </p:cNvPicPr>
+          <p:nvPr/>
+        </p:nvPicPr>
+        <p:blipFill>
+          <a:blip r:embed="rId2"/>
+          <a:stretch>
+            <a:fillRect/>
+          </a:stretch>
+        </p:blipFill>
+        <p:spPr>
+          <a:xfrm>
+            <a:off x="320040" y="1051560"/>
+            <a:ext cx="8534095" cy="5029200"/>
+          </a:xfrm>
+          <a:prstGeom prst="rect">
+            <a:avLst/>
+          </a:prstGeom>
+        </p:spPr>
+      </p:pic>
+      <p:sp>
+        <p:nvSpPr>
+          <p:cNvPr id="8" name="Rounded Rectangle 7"/>
           <p:cNvSpPr/>
           <p:nvPr/>
         </p:nvSpPr>
         <p:spPr>
           <a:xfrm>
-            <a:off x="457200" y="1280160"/>
-            <a:ext cx="2743200" cy="1920240"/>
+            <a:off x="8991295" y="1188720"/>
+            <a:ext cx="2880360" cy="4754880"/>
           </a:xfrm>
           <a:prstGeom prst="roundRect">
             <a:avLst/>
@@ -7125,14 +8138,14 @@
       </p:sp>
       <p:sp>
         <p:nvSpPr>
-          <p:cNvPr id="8" name="TextBox 7"/>
+          <p:cNvPr id="9" name="TextBox 8"/>
           <p:cNvSpPr txBox="1"/>
           <p:nvPr/>
         </p:nvSpPr>
         <p:spPr>
           <a:xfrm>
-            <a:off x="640080" y="1645919"/>
-            <a:ext cx="2377440" cy="411480"/>
+            <a:off x="9174175" y="1371600"/>
+            <a:ext cx="2514600" cy="365760"/>
           </a:xfrm>
           <a:prstGeom prst="rect">
             <a:avLst/>
@@ -7147,27 +8160,27 @@
           <a:p>
             <a:pPr algn="ctr"/>
             <a:r>
-              <a:rPr sz="2200" b="1">
+              <a:rPr sz="1600" b="1">
                 <a:solidFill>
                   <a:srgbClr val="0D9488"/>
                 </a:solidFill>
                 <a:latin typeface="Calibri"/>
               </a:rPr>
-              <a:t>Python</a:t>
-            </a:r>
-          </a:p>
-        </p:txBody>
-      </p:sp>
-      <p:sp>
-        <p:nvSpPr>
-          <p:cNvPr id="9" name="TextBox 8"/>
+              <a:t>What we see</a:t>
+            </a:r>
+          </a:p>
+        </p:txBody>
+      </p:sp>
+      <p:sp>
+        <p:nvSpPr>
+          <p:cNvPr id="10" name="TextBox 9"/>
           <p:cNvSpPr txBox="1"/>
           <p:nvPr/>
         </p:nvSpPr>
         <p:spPr>
           <a:xfrm>
-            <a:off x="640080" y="2240280"/>
-            <a:ext cx="2377440" cy="640080"/>
+            <a:off x="9174175" y="1920240"/>
+            <a:ext cx="2514600" cy="3657600"/>
           </a:xfrm>
           <a:prstGeom prst="rect">
             <a:avLst/>
@@ -7180,820 +8193,93 @@
           </a:bodyPr>
           <a:lstStyle/>
           <a:p>
-            <a:pPr algn="ctr"/>
-            <a:r>
-              <a:rPr sz="1500" b="0">
-                <a:solidFill>
-                  <a:srgbClr val="64748B"/>
-                </a:solidFill>
-                <a:latin typeface="Calibri"/>
-              </a:rPr>
-              <a:t>pandas, scikit-learn, Streamlit, httpx</a:t>
-            </a:r>
-          </a:p>
-        </p:txBody>
-      </p:sp>
-      <p:sp>
-        <p:nvSpPr>
-          <p:cNvPr id="10" name="Rounded Rectangle 9"/>
-          <p:cNvSpPr/>
-          <p:nvPr/>
-        </p:nvSpPr>
-        <p:spPr>
-          <a:xfrm>
-            <a:off x="3337560" y="1280160"/>
-            <a:ext cx="2743200" cy="1920240"/>
-          </a:xfrm>
-          <a:prstGeom prst="roundRect">
-            <a:avLst/>
-          </a:prstGeom>
-          <a:solidFill>
-            <a:srgbClr val="F0FDFA"/>
-          </a:solidFill>
-          <a:ln w="19050">
-            <a:solidFill>
-              <a:srgbClr val="0D9488"/>
-            </a:solidFill>
-          </a:ln>
-        </p:spPr>
-        <p:style>
-          <a:lnRef idx="1">
-            <a:schemeClr val="accent1"/>
-          </a:lnRef>
-          <a:fillRef idx="3">
-            <a:schemeClr val="accent1"/>
-          </a:fillRef>
-          <a:effectRef idx="2">
-            <a:schemeClr val="accent1"/>
-          </a:effectRef>
-          <a:fontRef idx="minor">
-            <a:schemeClr val="lt1"/>
-          </a:fontRef>
-        </p:style>
-        <p:txBody>
-          <a:bodyPr rtlCol="0" anchor="ctr"/>
-          <a:lstStyle/>
-          <a:p>
-            <a:pPr algn="ctr"/>
-          </a:p>
-        </p:txBody>
-      </p:sp>
-      <p:sp>
-        <p:nvSpPr>
-          <p:cNvPr id="11" name="TextBox 10"/>
-          <p:cNvSpPr txBox="1"/>
-          <p:nvPr/>
-        </p:nvSpPr>
-        <p:spPr>
-          <a:xfrm>
-            <a:off x="3520440" y="1645919"/>
-            <a:ext cx="2377440" cy="411480"/>
-          </a:xfrm>
-          <a:prstGeom prst="rect">
-            <a:avLst/>
-          </a:prstGeom>
-          <a:noFill/>
-        </p:spPr>
-        <p:txBody>
-          <a:bodyPr wrap="square">
-            <a:spAutoFit/>
-          </a:bodyPr>
-          <a:lstStyle/>
-          <a:p>
-            <a:pPr algn="ctr"/>
-            <a:r>
-              <a:rPr sz="2200" b="1">
-                <a:solidFill>
-                  <a:srgbClr val="0D9488"/>
-                </a:solidFill>
-                <a:latin typeface="Calibri"/>
-              </a:rPr>
-              <a:t>SQL / DB</a:t>
-            </a:r>
-          </a:p>
-        </p:txBody>
-      </p:sp>
-      <p:sp>
-        <p:nvSpPr>
-          <p:cNvPr id="12" name="TextBox 11"/>
-          <p:cNvSpPr txBox="1"/>
-          <p:nvPr/>
-        </p:nvSpPr>
-        <p:spPr>
-          <a:xfrm>
-            <a:off x="3520440" y="2240280"/>
-            <a:ext cx="2377440" cy="640080"/>
-          </a:xfrm>
-          <a:prstGeom prst="rect">
-            <a:avLst/>
-          </a:prstGeom>
-          <a:noFill/>
-        </p:spPr>
-        <p:txBody>
-          <a:bodyPr wrap="square">
-            <a:spAutoFit/>
-          </a:bodyPr>
-          <a:lstStyle/>
-          <a:p>
-            <a:pPr algn="ctr"/>
-            <a:r>
-              <a:rPr sz="1500" b="0">
-                <a:solidFill>
-                  <a:srgbClr val="64748B"/>
-                </a:solidFill>
-                <a:latin typeface="Calibri"/>
-              </a:rPr>
-              <a:t>SQLite + Supabase Postgres</a:t>
-            </a:r>
-          </a:p>
-        </p:txBody>
-      </p:sp>
-      <p:sp>
-        <p:nvSpPr>
-          <p:cNvPr id="13" name="Rounded Rectangle 12"/>
-          <p:cNvSpPr/>
-          <p:nvPr/>
-        </p:nvSpPr>
-        <p:spPr>
-          <a:xfrm>
-            <a:off x="6217920" y="1280160"/>
-            <a:ext cx="2743200" cy="1920240"/>
-          </a:xfrm>
-          <a:prstGeom prst="roundRect">
-            <a:avLst/>
-          </a:prstGeom>
-          <a:solidFill>
-            <a:srgbClr val="F0FDFA"/>
-          </a:solidFill>
-          <a:ln w="19050">
-            <a:solidFill>
-              <a:srgbClr val="0D9488"/>
-            </a:solidFill>
-          </a:ln>
-        </p:spPr>
-        <p:style>
-          <a:lnRef idx="1">
-            <a:schemeClr val="accent1"/>
-          </a:lnRef>
-          <a:fillRef idx="3">
-            <a:schemeClr val="accent1"/>
-          </a:fillRef>
-          <a:effectRef idx="2">
-            <a:schemeClr val="accent1"/>
-          </a:effectRef>
-          <a:fontRef idx="minor">
-            <a:schemeClr val="lt1"/>
-          </a:fontRef>
-        </p:style>
-        <p:txBody>
-          <a:bodyPr rtlCol="0" anchor="ctr"/>
-          <a:lstStyle/>
-          <a:p>
-            <a:pPr algn="ctr"/>
-          </a:p>
-        </p:txBody>
-      </p:sp>
-      <p:sp>
-        <p:nvSpPr>
-          <p:cNvPr id="14" name="TextBox 13"/>
-          <p:cNvSpPr txBox="1"/>
-          <p:nvPr/>
-        </p:nvSpPr>
-        <p:spPr>
-          <a:xfrm>
-            <a:off x="6400800" y="1645919"/>
-            <a:ext cx="2377440" cy="411480"/>
-          </a:xfrm>
-          <a:prstGeom prst="rect">
-            <a:avLst/>
-          </a:prstGeom>
-          <a:noFill/>
-        </p:spPr>
-        <p:txBody>
-          <a:bodyPr wrap="square">
-            <a:spAutoFit/>
-          </a:bodyPr>
-          <a:lstStyle/>
-          <a:p>
-            <a:pPr algn="ctr"/>
-            <a:r>
-              <a:rPr sz="2200" b="1">
-                <a:solidFill>
-                  <a:srgbClr val="0D9488"/>
-                </a:solidFill>
-                <a:latin typeface="Calibri"/>
-              </a:rPr>
-              <a:t>ETL</a:t>
-            </a:r>
-          </a:p>
-        </p:txBody>
-      </p:sp>
-      <p:sp>
-        <p:nvSpPr>
-          <p:cNvPr id="15" name="TextBox 14"/>
-          <p:cNvSpPr txBox="1"/>
-          <p:nvPr/>
-        </p:nvSpPr>
-        <p:spPr>
-          <a:xfrm>
-            <a:off x="6400800" y="2240280"/>
-            <a:ext cx="2377440" cy="640080"/>
-          </a:xfrm>
-          <a:prstGeom prst="rect">
-            <a:avLst/>
-          </a:prstGeom>
-          <a:noFill/>
-        </p:spPr>
-        <p:txBody>
-          <a:bodyPr wrap="square">
-            <a:spAutoFit/>
-          </a:bodyPr>
-          <a:lstStyle/>
-          <a:p>
-            <a:pPr algn="ctr"/>
-            <a:r>
-              <a:rPr sz="1500" b="0">
-                <a:solidFill>
-                  <a:srgbClr val="64748B"/>
-                </a:solidFill>
-                <a:latin typeface="Calibri"/>
-              </a:rPr>
-              <a:t>Scheduled collection &amp; migration scripts</a:t>
-            </a:r>
-          </a:p>
-        </p:txBody>
-      </p:sp>
-      <p:sp>
-        <p:nvSpPr>
-          <p:cNvPr id="16" name="Rounded Rectangle 15"/>
-          <p:cNvSpPr/>
-          <p:nvPr/>
-        </p:nvSpPr>
-        <p:spPr>
-          <a:xfrm>
-            <a:off x="9098280" y="1280160"/>
-            <a:ext cx="2743200" cy="1920240"/>
-          </a:xfrm>
-          <a:prstGeom prst="roundRect">
-            <a:avLst/>
-          </a:prstGeom>
-          <a:solidFill>
-            <a:srgbClr val="F0FDFA"/>
-          </a:solidFill>
-          <a:ln w="19050">
-            <a:solidFill>
-              <a:srgbClr val="0D9488"/>
-            </a:solidFill>
-          </a:ln>
-        </p:spPr>
-        <p:style>
-          <a:lnRef idx="1">
-            <a:schemeClr val="accent1"/>
-          </a:lnRef>
-          <a:fillRef idx="3">
-            <a:schemeClr val="accent1"/>
-          </a:fillRef>
-          <a:effectRef idx="2">
-            <a:schemeClr val="accent1"/>
-          </a:effectRef>
-          <a:fontRef idx="minor">
-            <a:schemeClr val="lt1"/>
-          </a:fontRef>
-        </p:style>
-        <p:txBody>
-          <a:bodyPr rtlCol="0" anchor="ctr"/>
-          <a:lstStyle/>
-          <a:p>
-            <a:pPr algn="ctr"/>
-          </a:p>
-        </p:txBody>
-      </p:sp>
-      <p:sp>
-        <p:nvSpPr>
-          <p:cNvPr id="17" name="TextBox 16"/>
-          <p:cNvSpPr txBox="1"/>
-          <p:nvPr/>
-        </p:nvSpPr>
-        <p:spPr>
-          <a:xfrm>
-            <a:off x="9281159" y="1645919"/>
-            <a:ext cx="2377440" cy="411480"/>
-          </a:xfrm>
-          <a:prstGeom prst="rect">
-            <a:avLst/>
-          </a:prstGeom>
-          <a:noFill/>
-        </p:spPr>
-        <p:txBody>
-          <a:bodyPr wrap="square">
-            <a:spAutoFit/>
-          </a:bodyPr>
-          <a:lstStyle/>
-          <a:p>
-            <a:pPr algn="ctr"/>
-            <a:r>
-              <a:rPr sz="2200" b="1">
-                <a:solidFill>
-                  <a:srgbClr val="0D9488"/>
-                </a:solidFill>
-                <a:latin typeface="Calibri"/>
-              </a:rPr>
-              <a:t>API</a:t>
-            </a:r>
-          </a:p>
-        </p:txBody>
-      </p:sp>
-      <p:sp>
-        <p:nvSpPr>
-          <p:cNvPr id="18" name="TextBox 17"/>
-          <p:cNvSpPr txBox="1"/>
-          <p:nvPr/>
-        </p:nvSpPr>
-        <p:spPr>
-          <a:xfrm>
-            <a:off x="9281159" y="2240280"/>
-            <a:ext cx="2377440" cy="640080"/>
-          </a:xfrm>
-          <a:prstGeom prst="rect">
-            <a:avLst/>
-          </a:prstGeom>
-          <a:noFill/>
-        </p:spPr>
-        <p:txBody>
-          <a:bodyPr wrap="square">
-            <a:spAutoFit/>
-          </a:bodyPr>
-          <a:lstStyle/>
-          <a:p>
-            <a:pPr algn="ctr"/>
-            <a:r>
-              <a:rPr sz="1500" b="0">
-                <a:solidFill>
-                  <a:srgbClr val="64748B"/>
-                </a:solidFill>
-                <a:latin typeface="Calibri"/>
-              </a:rPr>
-              <a:t>TD vacancy API + HKO weather</a:t>
-            </a:r>
-          </a:p>
-        </p:txBody>
-      </p:sp>
-      <p:sp>
-        <p:nvSpPr>
-          <p:cNvPr id="19" name="Rounded Rectangle 18"/>
-          <p:cNvSpPr/>
-          <p:nvPr/>
-        </p:nvSpPr>
-        <p:spPr>
-          <a:xfrm>
-            <a:off x="457200" y="3566160"/>
-            <a:ext cx="2743200" cy="1920240"/>
-          </a:xfrm>
-          <a:prstGeom prst="roundRect">
-            <a:avLst/>
-          </a:prstGeom>
-          <a:solidFill>
-            <a:srgbClr val="F0FDFA"/>
-          </a:solidFill>
-          <a:ln w="19050">
-            <a:solidFill>
-              <a:srgbClr val="0D9488"/>
-            </a:solidFill>
-          </a:ln>
-        </p:spPr>
-        <p:style>
-          <a:lnRef idx="1">
-            <a:schemeClr val="accent1"/>
-          </a:lnRef>
-          <a:fillRef idx="3">
-            <a:schemeClr val="accent1"/>
-          </a:fillRef>
-          <a:effectRef idx="2">
-            <a:schemeClr val="accent1"/>
-          </a:effectRef>
-          <a:fontRef idx="minor">
-            <a:schemeClr val="lt1"/>
-          </a:fontRef>
-        </p:style>
-        <p:txBody>
-          <a:bodyPr rtlCol="0" anchor="ctr"/>
-          <a:lstStyle/>
-          <a:p>
-            <a:pPr algn="ctr"/>
-          </a:p>
-        </p:txBody>
-      </p:sp>
-      <p:sp>
-        <p:nvSpPr>
-          <p:cNvPr id="20" name="TextBox 19"/>
-          <p:cNvSpPr txBox="1"/>
-          <p:nvPr/>
-        </p:nvSpPr>
-        <p:spPr>
-          <a:xfrm>
-            <a:off x="640080" y="3931920"/>
-            <a:ext cx="2377440" cy="411480"/>
-          </a:xfrm>
-          <a:prstGeom prst="rect">
-            <a:avLst/>
-          </a:prstGeom>
-          <a:noFill/>
-        </p:spPr>
-        <p:txBody>
-          <a:bodyPr wrap="square">
-            <a:spAutoFit/>
-          </a:bodyPr>
-          <a:lstStyle/>
-          <a:p>
-            <a:pPr algn="ctr"/>
-            <a:r>
-              <a:rPr sz="2200" b="1">
-                <a:solidFill>
-                  <a:srgbClr val="0D9488"/>
-                </a:solidFill>
-                <a:latin typeface="Calibri"/>
-              </a:rPr>
-              <a:t>EDA / Viz</a:t>
-            </a:r>
-          </a:p>
-        </p:txBody>
-      </p:sp>
-      <p:sp>
-        <p:nvSpPr>
-          <p:cNvPr id="21" name="TextBox 20"/>
-          <p:cNvSpPr txBox="1"/>
-          <p:nvPr/>
-        </p:nvSpPr>
-        <p:spPr>
-          <a:xfrm>
-            <a:off x="640080" y="4526280"/>
-            <a:ext cx="2377440" cy="640080"/>
-          </a:xfrm>
-          <a:prstGeom prst="rect">
-            <a:avLst/>
-          </a:prstGeom>
-          <a:noFill/>
-        </p:spPr>
-        <p:txBody>
-          <a:bodyPr wrap="square">
-            <a:spAutoFit/>
-          </a:bodyPr>
-          <a:lstStyle/>
-          <a:p>
-            <a:pPr algn="ctr"/>
-            <a:r>
-              <a:rPr sz="1500" b="0">
-                <a:solidFill>
-                  <a:srgbClr val="64748B"/>
-                </a:solidFill>
-                <a:latin typeface="Calibri"/>
-              </a:rPr>
-              <a:t>District heatmaps, live vs baseline</a:t>
-            </a:r>
-          </a:p>
-        </p:txBody>
-      </p:sp>
-      <p:sp>
-        <p:nvSpPr>
-          <p:cNvPr id="22" name="Rounded Rectangle 21"/>
-          <p:cNvSpPr/>
-          <p:nvPr/>
-        </p:nvSpPr>
-        <p:spPr>
-          <a:xfrm>
-            <a:off x="3337560" y="3566160"/>
-            <a:ext cx="2743200" cy="1920240"/>
-          </a:xfrm>
-          <a:prstGeom prst="roundRect">
-            <a:avLst/>
-          </a:prstGeom>
-          <a:solidFill>
-            <a:srgbClr val="F0FDFA"/>
-          </a:solidFill>
-          <a:ln w="19050">
-            <a:solidFill>
-              <a:srgbClr val="0D9488"/>
-            </a:solidFill>
-          </a:ln>
-        </p:spPr>
-        <p:style>
-          <a:lnRef idx="1">
-            <a:schemeClr val="accent1"/>
-          </a:lnRef>
-          <a:fillRef idx="3">
-            <a:schemeClr val="accent1"/>
-          </a:fillRef>
-          <a:effectRef idx="2">
-            <a:schemeClr val="accent1"/>
-          </a:effectRef>
-          <a:fontRef idx="minor">
-            <a:schemeClr val="lt1"/>
-          </a:fontRef>
-        </p:style>
-        <p:txBody>
-          <a:bodyPr rtlCol="0" anchor="ctr"/>
-          <a:lstStyle/>
-          <a:p>
-            <a:pPr algn="ctr"/>
-          </a:p>
-        </p:txBody>
-      </p:sp>
-      <p:sp>
-        <p:nvSpPr>
-          <p:cNvPr id="23" name="TextBox 22"/>
-          <p:cNvSpPr txBox="1"/>
-          <p:nvPr/>
-        </p:nvSpPr>
-        <p:spPr>
-          <a:xfrm>
-            <a:off x="3520440" y="3931920"/>
-            <a:ext cx="2377440" cy="411480"/>
-          </a:xfrm>
-          <a:prstGeom prst="rect">
-            <a:avLst/>
-          </a:prstGeom>
-          <a:noFill/>
-        </p:spPr>
-        <p:txBody>
-          <a:bodyPr wrap="square">
-            <a:spAutoFit/>
-          </a:bodyPr>
-          <a:lstStyle/>
-          <a:p>
-            <a:pPr algn="ctr"/>
-            <a:r>
-              <a:rPr sz="2200" b="1">
-                <a:solidFill>
-                  <a:srgbClr val="0D9488"/>
-                </a:solidFill>
-                <a:latin typeface="Calibri"/>
-              </a:rPr>
-              <a:t>ML</a:t>
-            </a:r>
-          </a:p>
-        </p:txBody>
-      </p:sp>
-      <p:sp>
-        <p:nvSpPr>
-          <p:cNvPr id="24" name="TextBox 23"/>
-          <p:cNvSpPr txBox="1"/>
-          <p:nvPr/>
-        </p:nvSpPr>
-        <p:spPr>
-          <a:xfrm>
-            <a:off x="3520440" y="4526280"/>
-            <a:ext cx="2377440" cy="640080"/>
-          </a:xfrm>
-          <a:prstGeom prst="rect">
-            <a:avLst/>
-          </a:prstGeom>
-          <a:noFill/>
-        </p:spPr>
-        <p:txBody>
-          <a:bodyPr wrap="square">
-            <a:spAutoFit/>
-          </a:bodyPr>
-          <a:lstStyle/>
-          <a:p>
-            <a:pPr algn="ctr"/>
-            <a:r>
-              <a:rPr sz="1500" b="0">
-                <a:solidFill>
-                  <a:srgbClr val="64748B"/>
-                </a:solidFill>
-                <a:latin typeface="Calibri"/>
-              </a:rPr>
-              <a:t>Baseline + Gradient Boosting</a:t>
-            </a:r>
-          </a:p>
-        </p:txBody>
-      </p:sp>
-      <p:sp>
-        <p:nvSpPr>
-          <p:cNvPr id="25" name="Rounded Rectangle 24"/>
-          <p:cNvSpPr/>
-          <p:nvPr/>
-        </p:nvSpPr>
-        <p:spPr>
-          <a:xfrm>
-            <a:off x="6217920" y="3566160"/>
-            <a:ext cx="2743200" cy="1920240"/>
-          </a:xfrm>
-          <a:prstGeom prst="roundRect">
-            <a:avLst/>
-          </a:prstGeom>
-          <a:solidFill>
-            <a:srgbClr val="F0FDFA"/>
-          </a:solidFill>
-          <a:ln w="19050">
-            <a:solidFill>
-              <a:srgbClr val="0D9488"/>
-            </a:solidFill>
-          </a:ln>
-        </p:spPr>
-        <p:style>
-          <a:lnRef idx="1">
-            <a:schemeClr val="accent1"/>
-          </a:lnRef>
-          <a:fillRef idx="3">
-            <a:schemeClr val="accent1"/>
-          </a:fillRef>
-          <a:effectRef idx="2">
-            <a:schemeClr val="accent1"/>
-          </a:effectRef>
-          <a:fontRef idx="minor">
-            <a:schemeClr val="lt1"/>
-          </a:fontRef>
-        </p:style>
-        <p:txBody>
-          <a:bodyPr rtlCol="0" anchor="ctr"/>
-          <a:lstStyle/>
-          <a:p>
-            <a:pPr algn="ctr"/>
-          </a:p>
-        </p:txBody>
-      </p:sp>
-      <p:sp>
-        <p:nvSpPr>
-          <p:cNvPr id="26" name="TextBox 25"/>
-          <p:cNvSpPr txBox="1"/>
-          <p:nvPr/>
-        </p:nvSpPr>
-        <p:spPr>
-          <a:xfrm>
-            <a:off x="6400800" y="3931920"/>
-            <a:ext cx="2377440" cy="411480"/>
-          </a:xfrm>
-          <a:prstGeom prst="rect">
-            <a:avLst/>
-          </a:prstGeom>
-          <a:noFill/>
-        </p:spPr>
-        <p:txBody>
-          <a:bodyPr wrap="square">
-            <a:spAutoFit/>
-          </a:bodyPr>
-          <a:lstStyle/>
-          <a:p>
-            <a:pPr algn="ctr"/>
-            <a:r>
-              <a:rPr sz="2200" b="1">
-                <a:solidFill>
-                  <a:srgbClr val="0D9488"/>
-                </a:solidFill>
-                <a:latin typeface="Calibri"/>
-              </a:rPr>
-              <a:t>GenAI</a:t>
-            </a:r>
-          </a:p>
-        </p:txBody>
-      </p:sp>
-      <p:sp>
-        <p:nvSpPr>
-          <p:cNvPr id="27" name="TextBox 26"/>
-          <p:cNvSpPr txBox="1"/>
-          <p:nvPr/>
-        </p:nvSpPr>
-        <p:spPr>
-          <a:xfrm>
-            <a:off x="6400800" y="4526280"/>
-            <a:ext cx="2377440" cy="640080"/>
-          </a:xfrm>
-          <a:prstGeom prst="rect">
-            <a:avLst/>
-          </a:prstGeom>
-          <a:noFill/>
-        </p:spPr>
-        <p:txBody>
-          <a:bodyPr wrap="square">
-            <a:spAutoFit/>
-          </a:bodyPr>
-          <a:lstStyle/>
-          <a:p>
-            <a:pPr algn="ctr"/>
-            <a:r>
-              <a:rPr sz="1500" b="0">
-                <a:solidFill>
-                  <a:srgbClr val="64748B"/>
-                </a:solidFill>
-                <a:latin typeface="Calibri"/>
-              </a:rPr>
-              <a:t>Intent parsing, voice I/O, agent UX</a:t>
-            </a:r>
-          </a:p>
-        </p:txBody>
-      </p:sp>
-      <p:sp>
-        <p:nvSpPr>
-          <p:cNvPr id="28" name="Rounded Rectangle 27"/>
-          <p:cNvSpPr/>
-          <p:nvPr/>
-        </p:nvSpPr>
-        <p:spPr>
-          <a:xfrm>
-            <a:off x="9098280" y="3566160"/>
-            <a:ext cx="2743200" cy="1920240"/>
-          </a:xfrm>
-          <a:prstGeom prst="roundRect">
-            <a:avLst/>
-          </a:prstGeom>
-          <a:solidFill>
-            <a:srgbClr val="F0FDFA"/>
-          </a:solidFill>
-          <a:ln w="19050">
-            <a:solidFill>
-              <a:srgbClr val="0D9488"/>
-            </a:solidFill>
-          </a:ln>
-        </p:spPr>
-        <p:style>
-          <a:lnRef idx="1">
-            <a:schemeClr val="accent1"/>
-          </a:lnRef>
-          <a:fillRef idx="3">
-            <a:schemeClr val="accent1"/>
-          </a:fillRef>
-          <a:effectRef idx="2">
-            <a:schemeClr val="accent1"/>
-          </a:effectRef>
-          <a:fontRef idx="minor">
-            <a:schemeClr val="lt1"/>
-          </a:fontRef>
-        </p:style>
-        <p:txBody>
-          <a:bodyPr rtlCol="0" anchor="ctr"/>
-          <a:lstStyle/>
-          <a:p>
-            <a:pPr algn="ctr"/>
-          </a:p>
-        </p:txBody>
-      </p:sp>
-      <p:sp>
-        <p:nvSpPr>
-          <p:cNvPr id="29" name="TextBox 28"/>
-          <p:cNvSpPr txBox="1"/>
-          <p:nvPr/>
-        </p:nvSpPr>
-        <p:spPr>
-          <a:xfrm>
-            <a:off x="9281159" y="3931920"/>
-            <a:ext cx="2377440" cy="411480"/>
-          </a:xfrm>
-          <a:prstGeom prst="rect">
-            <a:avLst/>
-          </a:prstGeom>
-          <a:noFill/>
-        </p:spPr>
-        <p:txBody>
-          <a:bodyPr wrap="square">
-            <a:spAutoFit/>
-          </a:bodyPr>
-          <a:lstStyle/>
-          <a:p>
-            <a:pPr algn="ctr"/>
-            <a:r>
-              <a:rPr sz="2200" b="1">
-                <a:solidFill>
-                  <a:srgbClr val="0D9488"/>
-                </a:solidFill>
-                <a:latin typeface="Calibri"/>
-              </a:rPr>
-              <a:t>Deploy</a:t>
-            </a:r>
-          </a:p>
-        </p:txBody>
-      </p:sp>
-      <p:sp>
-        <p:nvSpPr>
-          <p:cNvPr id="30" name="TextBox 29"/>
-          <p:cNvSpPr txBox="1"/>
-          <p:nvPr/>
-        </p:nvSpPr>
-        <p:spPr>
-          <a:xfrm>
-            <a:off x="9281159" y="4526280"/>
-            <a:ext cx="2377440" cy="640080"/>
-          </a:xfrm>
-          <a:prstGeom prst="rect">
-            <a:avLst/>
-          </a:prstGeom>
-          <a:noFill/>
-        </p:spPr>
-        <p:txBody>
-          <a:bodyPr wrap="square">
-            <a:spAutoFit/>
-          </a:bodyPr>
-          <a:lstStyle/>
-          <a:p>
-            <a:pPr algn="ctr"/>
-            <a:r>
-              <a:rPr sz="1500" b="0">
-                <a:solidFill>
-                  <a:srgbClr val="64748B"/>
-                </a:solidFill>
-                <a:latin typeface="Calibri"/>
-              </a:rPr>
-              <a:t>GitHub + Streamlit Cloud</a:t>
+            <a:pPr marL="228600" indent="-228600">
+              <a:buFont typeface="Arial"/>
+              <a:buChar char="•"/>
+              <a:spcAft>
+                <a:spcPts val="600"/>
+              </a:spcAft>
+            </a:pPr>
+            <a:r>
+              <a:rPr sz="1200" b="0">
+                <a:solidFill>
+                  <a:srgbClr val="0F172A"/>
+                </a:solidFill>
+                <a:latin typeface="Calibri"/>
+              </a:rPr>
+              <a:t>Capacity-weighted vacancy rate by district × hour</a:t>
+            </a:r>
+          </a:p>
+          <a:p>
+            <a:pPr marL="228600" indent="-228600">
+              <a:buFont typeface="Arial"/>
+              <a:buChar char="•"/>
+              <a:spcAft>
+                <a:spcPts val="600"/>
+              </a:spcAft>
+            </a:pPr>
+            <a:r>
+              <a:rPr sz="1200" b="0">
+                <a:solidFill>
+                  <a:srgbClr val="0F172A"/>
+                </a:solidFill>
+                <a:latin typeface="Calibri"/>
+              </a:rPr>
+              <a:t>Mid-day tighter; nights freer (especially Central Business District)</a:t>
+            </a:r>
+          </a:p>
+          <a:p>
+            <a:pPr marL="228600" indent="-228600">
+              <a:buFont typeface="Arial"/>
+              <a:buChar char="•"/>
+              <a:spcAft>
+                <a:spcPts val="600"/>
+              </a:spcAft>
+            </a:pPr>
+            <a:r>
+              <a:rPr sz="1200" b="0">
+                <a:solidFill>
+                  <a:srgbClr val="0F172A"/>
+                </a:solidFill>
+                <a:latin typeface="Calibri"/>
+              </a:rPr>
+              <a:t>Central Business District (中西 / 油尖旺 / 灣仔) lower average rate</a:t>
+            </a:r>
+          </a:p>
+          <a:p>
+            <a:pPr marL="228600" indent="-228600">
+              <a:buFont typeface="Arial"/>
+              <a:buChar char="•"/>
+              <a:spcAft>
+                <a:spcPts val="600"/>
+              </a:spcAft>
+            </a:pPr>
+            <a:r>
+              <a:rPr sz="1200" b="0">
+                <a:solidFill>
+                  <a:srgbClr val="0F172A"/>
+                </a:solidFill>
+                <a:latin typeface="Calibri"/>
+              </a:rPr>
+              <a:t>Some New Territories / Islands District stay freer on average</a:t>
+            </a:r>
+          </a:p>
+          <a:p>
+            <a:pPr marL="228600" indent="-228600">
+              <a:buFont typeface="Arial"/>
+              <a:buChar char="•"/>
+              <a:spcAft>
+                <a:spcPts val="600"/>
+              </a:spcAft>
+            </a:pPr>
+            <a:r>
+              <a:rPr sz="1200" b="0">
+                <a:solidFill>
+                  <a:srgbClr val="0F172A"/>
+                </a:solidFill>
+                <a:latin typeface="Calibri"/>
+              </a:rPr>
+              <a:t>Patterns justify time + location features</a:t>
             </a:r>
           </a:p>
         </p:txBody>
@@ -8166,7 +8452,7 @@
                 </a:solidFill>
                 <a:latin typeface="Calibri"/>
               </a:rPr>
-              <a:t>7 / 11</a:t>
+              <a:t>7 / 10</a:t>
             </a:r>
           </a:p>
         </p:txBody>
@@ -8200,14 +8486,14 @@
                 </a:solidFill>
                 <a:latin typeface="Calibri"/>
               </a:rPr>
-              <a:t>EDA Insights</a:t>
+              <a:t>Analysis &amp; Model Results</a:t>
             </a:r>
           </a:p>
         </p:txBody>
       </p:sp>
       <p:pic>
         <p:nvPicPr>
-          <p:cNvPr id="7" name="Picture 6" descr="nb_chart_03.png"/>
+          <p:cNvPr id="7" name="Picture 6" descr="model_mae.png"/>
           <p:cNvPicPr>
             <a:picLocks noChangeAspect="1"/>
           </p:cNvPicPr>
@@ -8221,69 +8507,48 @@
         </p:blipFill>
         <p:spPr>
           <a:xfrm>
-            <a:off x="320040" y="1051560"/>
-            <a:ext cx="8237740" cy="5029200"/>
+            <a:off x="365760" y="1051560"/>
+            <a:ext cx="5852160" cy="3046457"/>
           </a:xfrm>
           <a:prstGeom prst="rect">
             <a:avLst/>
           </a:prstGeom>
         </p:spPr>
       </p:pic>
-      <p:sp>
-        <p:nvSpPr>
-          <p:cNvPr id="8" name="Rounded Rectangle 7"/>
-          <p:cNvSpPr/>
-          <p:nvPr/>
-        </p:nvSpPr>
-        <p:spPr>
-          <a:xfrm>
-            <a:off x="7863840" y="1188720"/>
-            <a:ext cx="3931920" cy="4754880"/>
-          </a:xfrm>
-          <a:prstGeom prst="roundRect">
-            <a:avLst/>
-          </a:prstGeom>
-          <a:solidFill>
-            <a:srgbClr val="F0FDFA"/>
-          </a:solidFill>
-          <a:ln w="19050">
-            <a:solidFill>
-              <a:srgbClr val="0D9488"/>
-            </a:solidFill>
-          </a:ln>
-        </p:spPr>
-        <p:style>
-          <a:lnRef idx="1">
-            <a:schemeClr val="accent1"/>
-          </a:lnRef>
-          <a:fillRef idx="3">
-            <a:schemeClr val="accent1"/>
-          </a:fillRef>
-          <a:effectRef idx="2">
-            <a:schemeClr val="accent1"/>
-          </a:effectRef>
-          <a:fontRef idx="minor">
-            <a:schemeClr val="lt1"/>
-          </a:fontRef>
-        </p:style>
-        <p:txBody>
-          <a:bodyPr rtlCol="0" anchor="ctr"/>
-          <a:lstStyle/>
-          <a:p>
-            <a:pPr algn="ctr"/>
-          </a:p>
-        </p:txBody>
-      </p:sp>
-      <p:sp>
-        <p:nvSpPr>
-          <p:cNvPr id="9" name="TextBox 8"/>
+      <p:pic>
+        <p:nvPicPr>
+          <p:cNvPr id="9" name="Picture 8" descr="nb_chart_05.png"/>
+          <p:cNvPicPr>
+            <a:picLocks noChangeAspect="1"/>
+          </p:cNvPicPr>
+          <p:nvPr/>
+        </p:nvPicPr>
+        <p:blipFill>
+          <a:blip r:embed="rId4"/>
+          <a:stretch>
+            <a:fillRect/>
+          </a:stretch>
+        </p:blipFill>
+        <p:spPr>
+          <a:xfrm>
+            <a:off x="6400800" y="1051560"/>
+            <a:ext cx="5394960" cy="4234019"/>
+          </a:xfrm>
+          <a:prstGeom prst="rect">
+            <a:avLst/>
+          </a:prstGeom>
+        </p:spPr>
+      </p:pic>
+      <p:sp>
+        <p:nvSpPr>
+          <p:cNvPr id="10" name="TextBox 9"/>
           <p:cNvSpPr txBox="1"/>
           <p:nvPr/>
         </p:nvSpPr>
         <p:spPr>
           <a:xfrm>
-            <a:off x="8046720" y="1371600"/>
-            <a:ext cx="3566160" cy="365760"/>
+            <a:off x="457200" y="5716584"/>
+            <a:ext cx="10972800" cy="274320"/>
           </a:xfrm>
           <a:prstGeom prst="rect">
             <a:avLst/>
@@ -8296,122 +8561,43 @@
           </a:bodyPr>
           <a:lstStyle/>
           <a:p>
-            <a:pPr algn="ctr"/>
-            <a:r>
-              <a:rPr sz="2000" b="1">
-                <a:solidFill>
-                  <a:srgbClr val="0D9488"/>
-                </a:solidFill>
-                <a:latin typeface="Calibri"/>
-              </a:rPr>
-              <a:t>What we see</a:t>
-            </a:r>
-          </a:p>
-        </p:txBody>
-      </p:sp>
-      <p:sp>
-        <p:nvSpPr>
-          <p:cNvPr id="10" name="TextBox 9"/>
-          <p:cNvSpPr txBox="1"/>
-          <p:nvPr/>
-        </p:nvSpPr>
-        <p:spPr>
-          <a:xfrm>
-            <a:off x="8046720" y="1920240"/>
-            <a:ext cx="3566160" cy="3657600"/>
-          </a:xfrm>
-          <a:prstGeom prst="rect">
-            <a:avLst/>
-          </a:prstGeom>
-          <a:noFill/>
-        </p:spPr>
-        <p:txBody>
-          <a:bodyPr wrap="square">
-            <a:spAutoFit/>
-          </a:bodyPr>
-          <a:lstStyle/>
-          <a:p>
-            <a:pPr>
-              <a:spcAft>
-                <a:spcPts val="600"/>
-              </a:spcAft>
-            </a:pPr>
-            <a:r>
-              <a:rPr sz="1600" b="0">
-                <a:solidFill>
-                  <a:srgbClr val="0F172A"/>
-                </a:solidFill>
-                <a:latin typeface="Calibri"/>
-              </a:rPr>
-              <a:t>• Weekday baseline varies strongly by district × hour</a:t>
-            </a:r>
-          </a:p>
-          <a:p>
-            <a:pPr>
-              <a:spcAft>
-                <a:spcPts val="600"/>
-              </a:spcAft>
-            </a:pPr>
-            <a:r>
-              <a:rPr sz="1600" b="0">
-                <a:solidFill>
-                  <a:srgbClr val="0F172A"/>
-                </a:solidFill>
-                <a:latin typeface="Calibri"/>
-              </a:rPr>
-              <a:t>• Mid-day tends to be tighter; nights often freer</a:t>
-            </a:r>
-          </a:p>
-          <a:p>
-            <a:pPr>
-              <a:spcAft>
-                <a:spcPts val="600"/>
-              </a:spcAft>
-            </a:pPr>
-            <a:r>
-              <a:rPr sz="1600" b="0">
-                <a:solidFill>
-                  <a:srgbClr val="0F172A"/>
-                </a:solidFill>
-                <a:latin typeface="Calibri"/>
-              </a:rPr>
-              <a:t>• Central &amp; Western / YTM show higher mean vacancy</a:t>
-            </a:r>
-          </a:p>
-          <a:p>
-            <a:pPr>
-              <a:spcAft>
-                <a:spcPts val="600"/>
-              </a:spcAft>
-            </a:pPr>
-            <a:r>
-              <a:rPr sz="1600" b="0">
-                <a:solidFill>
-                  <a:srgbClr val="0F172A"/>
-                </a:solidFill>
-                <a:latin typeface="Calibri"/>
-              </a:rPr>
-              <a:t>• Dense residential districts stay tighter overall</a:t>
-            </a:r>
-          </a:p>
-          <a:p>
-            <a:pPr>
-              <a:spcAft>
-                <a:spcPts val="600"/>
-              </a:spcAft>
-            </a:pPr>
-            <a:r>
-              <a:rPr sz="1600" b="0">
-                <a:solidFill>
-                  <a:srgbClr val="0F172A"/>
-                </a:solidFill>
-                <a:latin typeface="Calibri"/>
-              </a:rPr>
-              <a:t>• Patterns justify time + location features</a:t>
-            </a:r>
-          </a:p>
-        </p:txBody>
-      </p:sp>
+            <a:pPr algn="l"/>
+            <a:r>
+              <a:rPr sz="1400" b="0">
+                <a:solidFill>
+                  <a:srgbClr val="64748B"/>
+                </a:solidFill>
+                <a:latin typeface="Calibri"/>
+              </a:rPr>
+              <a:t>Gradient Boosting beats same-hour baseline; Friday 19:00 district ranking on the right</a:t>
+            </a:r>
+          </a:p>
+        </p:txBody>
+      </p:sp>
+      <p:pic>
+        <p:nvPicPr>
+          <p:cNvPr id="11" name="Picture 10" descr="model_metrics.png"/>
+          <p:cNvPicPr>
+            <a:picLocks noChangeAspect="1"/>
+          </p:cNvPicPr>
+          <p:nvPr/>
+        </p:nvPicPr>
+        <p:blipFill>
+          <a:blip r:embed="rId15"/>
+          <a:stretch>
+            <a:fillRect/>
+          </a:stretch>
+        </p:blipFill>
+        <p:spPr>
+          <a:xfrm>
+            <a:off x="365760" y="4160520"/>
+            <a:ext cx="5852160" cy="1528064"/>
+          </a:xfrm>
+          <a:prstGeom prst="rect">
+            <a:avLst/>
+          </a:prstGeom>
+        </p:spPr>
+      </p:pic>
     </p:spTree>
   </p:cSld>
   <p:clrMapOvr>
@@ -8580,7 +8766,7 @@
                 </a:solidFill>
                 <a:latin typeface="Calibri"/>
               </a:rPr>
-              <a:t>8 / 11</a:t>
+              <a:t>8 / 10</a:t>
             </a:r>
           </a:p>
         </p:txBody>
@@ -8614,69 +8800,66 @@
                 </a:solidFill>
                 <a:latin typeface="Calibri"/>
               </a:rPr>
-              <a:t>Analysis &amp; Model Results</a:t>
-            </a:r>
-          </a:p>
-        </p:txBody>
-      </p:sp>
-      <p:pic>
-        <p:nvPicPr>
-          <p:cNvPr id="7" name="Picture 6" descr="model_mae.png"/>
-          <p:cNvPicPr>
-            <a:picLocks noChangeAspect="1"/>
-          </p:cNvPicPr>
-          <p:nvPr/>
-        </p:nvPicPr>
-        <p:blipFill>
-          <a:blip r:embed="rId2"/>
-          <a:stretch>
-            <a:fillRect/>
-          </a:stretch>
-        </p:blipFill>
-        <p:spPr>
-          <a:xfrm>
-            <a:off x="365760" y="1051560"/>
-            <a:ext cx="5852160" cy="3046457"/>
-          </a:xfrm>
-          <a:prstGeom prst="rect">
-            <a:avLst/>
-          </a:prstGeom>
-        </p:spPr>
-      </p:pic>
-      <p:pic>
-        <p:nvPicPr>
-          <p:cNvPr id="9" name="Picture 8" descr="nb_chart_05.png"/>
-          <p:cNvPicPr>
-            <a:picLocks noChangeAspect="1"/>
-          </p:cNvPicPr>
-          <p:nvPr/>
-        </p:nvPicPr>
-        <p:blipFill>
-          <a:blip r:embed="rId4"/>
-          <a:stretch>
-            <a:fillRect/>
-          </a:stretch>
-        </p:blipFill>
-        <p:spPr>
-          <a:xfrm>
-            <a:off x="6400800" y="1051560"/>
-            <a:ext cx="5394960" cy="4234019"/>
-          </a:xfrm>
-          <a:prstGeom prst="rect">
-            <a:avLst/>
-          </a:prstGeom>
-        </p:spPr>
-      </p:pic>
-      <p:sp>
-        <p:nvSpPr>
-          <p:cNvPr id="10" name="TextBox 9"/>
+              <a:t>Challenges, Limitations &amp; Future Work</a:t>
+            </a:r>
+          </a:p>
+        </p:txBody>
+      </p:sp>
+      <p:sp>
+        <p:nvSpPr>
+          <p:cNvPr id="7" name="Rounded Rectangle 6"/>
+          <p:cNvSpPr/>
+          <p:nvPr/>
+        </p:nvSpPr>
+        <p:spPr>
+          <a:xfrm>
+            <a:off x="457200" y="1188720"/>
+            <a:ext cx="5486400" cy="4754880"/>
+          </a:xfrm>
+          <a:prstGeom prst="roundRect">
+            <a:avLst/>
+          </a:prstGeom>
+          <a:solidFill>
+            <a:srgbClr val="F0FDFA"/>
+          </a:solidFill>
+          <a:ln w="19050">
+            <a:solidFill>
+              <a:srgbClr val="0D9488"/>
+            </a:solidFill>
+          </a:ln>
+        </p:spPr>
+        <p:style>
+          <a:lnRef idx="1">
+            <a:schemeClr val="accent1"/>
+          </a:lnRef>
+          <a:fillRef idx="3">
+            <a:schemeClr val="accent1"/>
+          </a:fillRef>
+          <a:effectRef idx="2">
+            <a:schemeClr val="accent1"/>
+          </a:effectRef>
+          <a:fontRef idx="minor">
+            <a:schemeClr val="lt1"/>
+          </a:fontRef>
+        </p:style>
+        <p:txBody>
+          <a:bodyPr rtlCol="0" anchor="ctr"/>
+          <a:lstStyle/>
+          <a:p>
+            <a:pPr algn="ctr"/>
+          </a:p>
+        </p:txBody>
+      </p:sp>
+      <p:sp>
+        <p:nvSpPr>
+          <p:cNvPr id="8" name="TextBox 7"/>
           <p:cNvSpPr txBox="1"/>
           <p:nvPr/>
         </p:nvSpPr>
         <p:spPr>
           <a:xfrm>
-            <a:off x="457200" y="5716584"/>
-            <a:ext cx="10972800" cy="274320"/>
+            <a:off x="640080" y="1371600"/>
+            <a:ext cx="5029200" cy="365760"/>
           </a:xfrm>
           <a:prstGeom prst="rect">
             <a:avLst/>
@@ -8689,43 +8872,343 @@
           </a:bodyPr>
           <a:lstStyle/>
           <a:p>
-            <a:pPr algn="l"/>
-            <a:r>
-              <a:rPr sz="1400" b="0">
-                <a:solidFill>
-                  <a:srgbClr val="64748B"/>
-                </a:solidFill>
-                <a:latin typeface="Calibri"/>
-              </a:rPr>
-              <a:t>GB beats same-hour baseline; Friday 19:00 district ranking on the right</a:t>
-            </a:r>
-          </a:p>
-        </p:txBody>
-      </p:sp>
-      <p:pic>
-        <p:nvPicPr>
-          <p:cNvPr id="11" name="Picture 10" descr="model_metrics.png"/>
-          <p:cNvPicPr>
-            <a:picLocks noChangeAspect="1"/>
-          </p:cNvPicPr>
-          <p:nvPr/>
-        </p:nvPicPr>
-        <p:blipFill>
-          <a:blip r:embed="rId15"/>
-          <a:stretch>
-            <a:fillRect/>
-          </a:stretch>
-        </p:blipFill>
-        <p:spPr>
-          <a:xfrm>
-            <a:off x="365760" y="4160520"/>
-            <a:ext cx="5852160" cy="1528064"/>
-          </a:xfrm>
-          <a:prstGeom prst="rect">
-            <a:avLst/>
-          </a:prstGeom>
-        </p:spPr>
-      </p:pic>
+            <a:pPr algn="ctr"/>
+            <a:r>
+              <a:rPr sz="2000" b="1">
+                <a:solidFill>
+                  <a:srgbClr val="0D9488"/>
+                </a:solidFill>
+                <a:latin typeface="Calibri"/>
+              </a:rPr>
+              <a:t>Challenges &amp; limitations</a:t>
+            </a:r>
+          </a:p>
+        </p:txBody>
+      </p:sp>
+      <p:sp>
+        <p:nvSpPr>
+          <p:cNvPr id="9" name="TextBox 8"/>
+          <p:cNvSpPr txBox="1"/>
+          <p:nvPr/>
+        </p:nvSpPr>
+        <p:spPr>
+          <a:xfrm>
+            <a:off x="640080" y="1920240"/>
+            <a:ext cx="5029200" cy="3657600"/>
+          </a:xfrm>
+          <a:prstGeom prst="rect">
+            <a:avLst/>
+          </a:prstGeom>
+          <a:noFill/>
+        </p:spPr>
+        <p:txBody>
+          <a:bodyPr wrap="square">
+            <a:spAutoFit/>
+          </a:bodyPr>
+          <a:lstStyle/>
+          <a:p>
+            <a:pPr marL="228600" indent="-228600">
+              <a:buFont typeface="Arial"/>
+              <a:buChar char="•"/>
+              <a:spcAft>
+                <a:spcPts val="600"/>
+              </a:spcAft>
+            </a:pPr>
+            <a:r>
+              <a:rPr sz="1600" b="0">
+                <a:solidFill>
+                  <a:srgbClr val="0F172A"/>
+                </a:solidFill>
+                <a:latin typeface="Calibri"/>
+              </a:rPr>
+              <a:t>Early live collection gaps when machine sleeps</a:t>
+            </a:r>
+          </a:p>
+          <a:p>
+            <a:pPr marL="228600" indent="-228600">
+              <a:buFont typeface="Arial"/>
+              <a:buChar char="•"/>
+              <a:spcAft>
+                <a:spcPts val="600"/>
+              </a:spcAft>
+            </a:pPr>
+            <a:r>
+              <a:rPr sz="1600" b="0">
+                <a:solidFill>
+                  <a:srgbClr val="0F172A"/>
+                </a:solidFill>
+                <a:latin typeface="Calibri"/>
+              </a:rPr>
+              <a:t>Car parks only — not on-street meters</a:t>
+            </a:r>
+          </a:p>
+          <a:p>
+            <a:pPr marL="228600" indent="-228600">
+              <a:buFont typeface="Arial"/>
+              <a:buChar char="•"/>
+              <a:spcAft>
+                <a:spcPts val="600"/>
+              </a:spcAft>
+            </a:pPr>
+            <a:r>
+              <a:rPr sz="1600" b="0">
+                <a:solidFill>
+                  <a:srgbClr val="0F172A"/>
+                </a:solidFill>
+                <a:latin typeface="Calibri"/>
+              </a:rPr>
+              <a:t>Weather signals collected but underused</a:t>
+            </a:r>
+          </a:p>
+          <a:p>
+            <a:pPr marL="228600" indent="-228600">
+              <a:buFont typeface="Arial"/>
+              <a:buChar char="•"/>
+              <a:spcAft>
+                <a:spcPts val="600"/>
+              </a:spcAft>
+            </a:pPr>
+            <a:r>
+              <a:rPr sz="1600" b="0">
+                <a:solidFill>
+                  <a:srgbClr val="0F172A"/>
+                </a:solidFill>
+                <a:latin typeface="Calibri"/>
+              </a:rPr>
+              <a:t>Short early training window; later expanded with 1-year baselines</a:t>
+            </a:r>
+          </a:p>
+          <a:p>
+            <a:pPr marL="228600" indent="-228600">
+              <a:buFont typeface="Arial"/>
+              <a:buChar char="•"/>
+              <a:spcAft>
+                <a:spcPts val="600"/>
+              </a:spcAft>
+            </a:pPr>
+            <a:r>
+              <a:rPr sz="1600" b="0">
+                <a:solidFill>
+                  <a:srgbClr val="0F172A"/>
+                </a:solidFill>
+                <a:latin typeface="Calibri"/>
+              </a:rPr>
+              <a:t>Cloud disk limits for raw historical imports</a:t>
+            </a:r>
+          </a:p>
+        </p:txBody>
+      </p:sp>
+      <p:sp>
+        <p:nvSpPr>
+          <p:cNvPr id="10" name="Rounded Rectangle 9"/>
+          <p:cNvSpPr/>
+          <p:nvPr/>
+        </p:nvSpPr>
+        <p:spPr>
+          <a:xfrm>
+            <a:off x="6217920" y="1188720"/>
+            <a:ext cx="5486400" cy="4754880"/>
+          </a:xfrm>
+          <a:prstGeom prst="roundRect">
+            <a:avLst/>
+          </a:prstGeom>
+          <a:solidFill>
+            <a:srgbClr val="F0FDFA"/>
+          </a:solidFill>
+          <a:ln w="19050">
+            <a:solidFill>
+              <a:srgbClr val="0D9488"/>
+            </a:solidFill>
+          </a:ln>
+        </p:spPr>
+        <p:style>
+          <a:lnRef idx="1">
+            <a:schemeClr val="accent1"/>
+          </a:lnRef>
+          <a:fillRef idx="3">
+            <a:schemeClr val="accent1"/>
+          </a:fillRef>
+          <a:effectRef idx="2">
+            <a:schemeClr val="accent1"/>
+          </a:effectRef>
+          <a:fontRef idx="minor">
+            <a:schemeClr val="lt1"/>
+          </a:fontRef>
+        </p:style>
+        <p:txBody>
+          <a:bodyPr rtlCol="0" anchor="ctr"/>
+          <a:lstStyle/>
+          <a:p>
+            <a:pPr algn="ctr"/>
+          </a:p>
+        </p:txBody>
+      </p:sp>
+      <p:sp>
+        <p:nvSpPr>
+          <p:cNvPr id="11" name="TextBox 10"/>
+          <p:cNvSpPr txBox="1"/>
+          <p:nvPr/>
+        </p:nvSpPr>
+        <p:spPr>
+          <a:xfrm>
+            <a:off x="6400800" y="1371600"/>
+            <a:ext cx="5029200" cy="365760"/>
+          </a:xfrm>
+          <a:prstGeom prst="rect">
+            <a:avLst/>
+          </a:prstGeom>
+          <a:noFill/>
+        </p:spPr>
+        <p:txBody>
+          <a:bodyPr wrap="square">
+            <a:spAutoFit/>
+          </a:bodyPr>
+          <a:lstStyle/>
+          <a:p>
+            <a:pPr algn="ctr"/>
+            <a:r>
+              <a:rPr sz="2000" b="1">
+                <a:solidFill>
+                  <a:srgbClr val="0D9488"/>
+                </a:solidFill>
+                <a:latin typeface="Calibri"/>
+              </a:rPr>
+              <a:t>Future work</a:t>
+            </a:r>
+          </a:p>
+        </p:txBody>
+      </p:sp>
+      <p:sp>
+        <p:nvSpPr>
+          <p:cNvPr id="12" name="TextBox 11"/>
+          <p:cNvSpPr txBox="1"/>
+          <p:nvPr/>
+        </p:nvSpPr>
+        <p:spPr>
+          <a:xfrm>
+            <a:off x="6400800" y="1920240"/>
+            <a:ext cx="5029200" cy="3657600"/>
+          </a:xfrm>
+          <a:prstGeom prst="rect">
+            <a:avLst/>
+          </a:prstGeom>
+          <a:noFill/>
+        </p:spPr>
+        <p:txBody>
+          <a:bodyPr wrap="square">
+            <a:spAutoFit/>
+          </a:bodyPr>
+          <a:lstStyle/>
+          <a:p>
+            <a:pPr marL="228600" indent="-228600">
+              <a:buFont typeface="Arial"/>
+              <a:buChar char="•"/>
+              <a:spcAft>
+                <a:spcPts val="600"/>
+              </a:spcAft>
+            </a:pPr>
+            <a:r>
+              <a:rPr sz="1600" b="0">
+                <a:solidFill>
+                  <a:srgbClr val="0F172A"/>
+                </a:solidFill>
+                <a:latin typeface="Calibri"/>
+              </a:rPr>
+              <a:t>Cloud cron / Edge Function for 24×7 collection</a:t>
+            </a:r>
+          </a:p>
+          <a:p>
+            <a:pPr marL="228600" indent="-228600">
+              <a:buFont typeface="Arial"/>
+              <a:buChar char="•"/>
+              <a:spcAft>
+                <a:spcPts val="600"/>
+              </a:spcAft>
+            </a:pPr>
+            <a:r>
+              <a:rPr sz="1600" b="0">
+                <a:solidFill>
+                  <a:srgbClr val="0F172A"/>
+                </a:solidFill>
+                <a:latin typeface="Calibri"/>
+              </a:rPr>
+              <a:t>Richer weather + holiday / event features</a:t>
+            </a:r>
+          </a:p>
+          <a:p>
+            <a:pPr marL="228600" indent="-228600">
+              <a:buFont typeface="Arial"/>
+              <a:buChar char="•"/>
+              <a:spcAft>
+                <a:spcPts val="600"/>
+              </a:spcAft>
+            </a:pPr>
+            <a:r>
+              <a:rPr sz="1600" b="0">
+                <a:solidFill>
+                  <a:srgbClr val="0F172A"/>
+                </a:solidFill>
+                <a:latin typeface="Calibri"/>
+              </a:rPr>
+              <a:t>Persist trained models to storage</a:t>
+            </a:r>
+          </a:p>
+          <a:p>
+            <a:pPr marL="228600" indent="-228600">
+              <a:buFont typeface="Arial"/>
+              <a:buChar char="•"/>
+              <a:spcAft>
+                <a:spcPts val="600"/>
+              </a:spcAft>
+            </a:pPr>
+            <a:r>
+              <a:rPr sz="1600" b="0">
+                <a:solidFill>
+                  <a:srgbClr val="0F172A"/>
+                </a:solidFill>
+                <a:latin typeface="Calibri"/>
+              </a:rPr>
+              <a:t>Vacancy level classes (low / mid / high)</a:t>
+            </a:r>
+          </a:p>
+          <a:p>
+            <a:pPr marL="228600" indent="-228600">
+              <a:buFont typeface="Arial"/>
+              <a:buChar char="•"/>
+              <a:spcAft>
+                <a:spcPts val="600"/>
+              </a:spcAft>
+            </a:pPr>
+            <a:r>
+              <a:rPr sz="1600" b="0">
+                <a:solidFill>
+                  <a:srgbClr val="0F172A"/>
+                </a:solidFill>
+                <a:latin typeface="Calibri"/>
+              </a:rPr>
+              <a:t>Stronger LLM-generated suggestion copy</a:t>
+            </a:r>
+          </a:p>
+          <a:p>
+            <a:pPr marL="228600" indent="-228600">
+              <a:buFont typeface="Arial"/>
+              <a:buChar char="•"/>
+              <a:spcAft>
+                <a:spcPts val="600"/>
+              </a:spcAft>
+            </a:pPr>
+            <a:r>
+              <a:rPr sz="1600" b="0">
+                <a:solidFill>
+                  <a:srgbClr val="0F172A"/>
+                </a:solidFill>
+                <a:latin typeface="Calibri"/>
+              </a:rPr>
+              <a:t>Deeper error analysis by district / hour</a:t>
+            </a:r>
+          </a:p>
+        </p:txBody>
+      </p:sp>
     </p:spTree>
   </p:cSld>
   <p:clrMapOvr>
@@ -8847,11 +9330,12 @@
           <a:noFill/>
         </p:spPr>
         <p:txBody>
-          <a:bodyPr wrap="none">
+          <a:bodyPr wrap="square">
             <a:spAutoFit/>
           </a:bodyPr>
           <a:lstStyle/>
           <a:p>
+            <a:pPr algn="l"/>
             <a:r>
               <a:rPr sz="1200" b="0">
                 <a:solidFill>
@@ -8881,7 +9365,7 @@
           <a:noFill/>
         </p:spPr>
         <p:txBody>
-          <a:bodyPr wrap="none">
+          <a:bodyPr wrap="square">
             <a:spAutoFit/>
           </a:bodyPr>
           <a:lstStyle/>
@@ -8894,7 +9378,7 @@
                 </a:solidFill>
                 <a:latin typeface="Calibri"/>
               </a:rPr>
-              <a:t>9 / 11</a:t>
+              <a:t>9 / 10</a:t>
             </a:r>
           </a:p>
         </p:txBody>
@@ -8916,11 +9400,12 @@
           <a:noFill/>
         </p:spPr>
         <p:txBody>
-          <a:bodyPr wrap="none">
+          <a:bodyPr wrap="square">
             <a:spAutoFit/>
           </a:bodyPr>
           <a:lstStyle/>
           <a:p>
+            <a:pPr algn="l"/>
             <a:r>
               <a:rPr sz="3000" b="1">
                 <a:solidFill>
@@ -8928,7 +9413,7 @@
                 </a:solidFill>
                 <a:latin typeface="Calibri"/>
               </a:rPr>
-              <a:t>Challenges, Limitations &amp; Future Work</a:t>
+              <a:t>Conclusion</a:t>
             </a:r>
           </a:p>
         </p:txBody>
@@ -8942,10 +9427,12 @@
         <p:spPr>
           <a:xfrm>
             <a:off x="457200" y="1188720"/>
-            <a:ext cx="5486400" cy="4754880"/>
+            <a:ext cx="11247120" cy="4754880"/>
           </a:xfrm>
           <a:prstGeom prst="roundRect">
-            <a:avLst/>
+            <a:avLst>
+              <a:gd name="adj" fmla="val 16667"/>
+            </a:avLst>
           </a:prstGeom>
           <a:solidFill>
             <a:srgbClr val="F0FDFA"/>
@@ -8986,8 +9473,8 @@
         </p:nvSpPr>
         <p:spPr>
           <a:xfrm>
-            <a:off x="640080" y="1371600"/>
-            <a:ext cx="5029200" cy="365760"/>
+            <a:off x="731520" y="1463040"/>
+            <a:ext cx="10515600" cy="4206240"/>
           </a:xfrm>
           <a:prstGeom prst="rect">
             <a:avLst/>
@@ -9000,317 +9487,87 @@
           </a:bodyPr>
           <a:lstStyle/>
           <a:p>
-            <a:pPr algn="ctr"/>
-            <a:r>
-              <a:rPr sz="2000" b="1">
-                <a:solidFill>
-                  <a:srgbClr val="0D9488"/>
-                </a:solidFill>
-                <a:latin typeface="Calibri"/>
-              </a:rPr>
-              <a:t>Challenges &amp; limitations</a:t>
-            </a:r>
-          </a:p>
-        </p:txBody>
-      </p:sp>
-      <p:sp>
-        <p:nvSpPr>
-          <p:cNvPr id="9" name="TextBox 8"/>
-          <p:cNvSpPr txBox="1"/>
-          <p:nvPr/>
-        </p:nvSpPr>
-        <p:spPr>
-          <a:xfrm>
-            <a:off x="640080" y="1920240"/>
-            <a:ext cx="5029200" cy="3657600"/>
-          </a:xfrm>
-          <a:prstGeom prst="rect">
-            <a:avLst/>
-          </a:prstGeom>
-          <a:noFill/>
-        </p:spPr>
-        <p:txBody>
-          <a:bodyPr wrap="square">
-            <a:spAutoFit/>
-          </a:bodyPr>
-          <a:lstStyle/>
-          <a:p>
-            <a:pPr>
+            <a:pPr algn="l" marL="228600" indent="-228600">
+              <a:buFont typeface="Arial"/>
+              <a:buChar char="•"/>
+              <a:spcBef>
+                <a:spcPts val="600"/>
+              </a:spcBef>
               <a:spcAft>
-                <a:spcPts val="600"/>
+                <a:spcPts val="1800"/>
               </a:spcAft>
             </a:pPr>
             <a:r>
-              <a:rPr sz="1600" b="0">
+              <a:rPr sz="1800" b="0">
                 <a:solidFill>
                   <a:srgbClr val="0F172A"/>
                 </a:solidFill>
                 <a:latin typeface="Calibri"/>
               </a:rPr>
-              <a:t>• Early live collection gaps when machine sleeps</a:t>
-            </a:r>
-          </a:p>
-          <a:p>
-            <a:pPr>
+              <a:t>Built an end-to-end data → Machine Learning → AI Agent product for HK parking vacancy</a:t>
+            </a:r>
+          </a:p>
+          <a:p>
+            <a:pPr algn="l" marL="228600" indent="-228600">
+              <a:buFont typeface="Arial"/>
+              <a:buChar char="•"/>
+              <a:spcBef>
+                <a:spcPts val="600"/>
+              </a:spcBef>
               <a:spcAft>
-                <a:spcPts val="600"/>
+                <a:spcPts val="1800"/>
               </a:spcAft>
             </a:pPr>
             <a:r>
-              <a:rPr sz="1600" b="0">
+              <a:rPr sz="1800" b="0">
                 <a:solidFill>
                   <a:srgbClr val="0F172A"/>
                 </a:solidFill>
                 <a:latin typeface="Calibri"/>
               </a:rPr>
-              <a:t>• Car parks only — not on-street meters</a:t>
-            </a:r>
-          </a:p>
-          <a:p>
-            <a:pPr>
+              <a:t>Gradient Boosting improves MAE from ~17.8 → 10.40; classification F1 ≈ 0.957</a:t>
+            </a:r>
+          </a:p>
+          <a:p>
+            <a:pPr algn="l" marL="228600" indent="-228600">
+              <a:buFont typeface="Arial"/>
+              <a:buChar char="•"/>
+              <a:spcBef>
+                <a:spcPts val="600"/>
+              </a:spcBef>
               <a:spcAft>
-                <a:spcPts val="600"/>
+                <a:spcPts val="1800"/>
               </a:spcAft>
             </a:pPr>
             <a:r>
-              <a:rPr sz="1600" b="0">
+              <a:rPr sz="1800" b="0">
                 <a:solidFill>
                   <a:srgbClr val="0F172A"/>
                 </a:solidFill>
                 <a:latin typeface="Calibri"/>
               </a:rPr>
-              <a:t>• Weather signals collected but underused</a:t>
-            </a:r>
-          </a:p>
-          <a:p>
-            <a:pPr>
+              <a:t>「咪再兜」lets drivers ask in Cantonese (text/voice) and get ranked suggestions</a:t>
+            </a:r>
+          </a:p>
+          <a:p>
+            <a:pPr algn="l" marL="228600" indent="-228600">
+              <a:buFont typeface="Arial"/>
+              <a:buChar char="•"/>
+              <a:spcBef>
+                <a:spcPts val="600"/>
+              </a:spcBef>
               <a:spcAft>
-                <a:spcPts val="600"/>
+                <a:spcPts val="1800"/>
               </a:spcAft>
             </a:pPr>
             <a:r>
-              <a:rPr sz="1600" b="0">
+              <a:rPr sz="1800" b="0">
                 <a:solidFill>
                   <a:srgbClr val="0F172A"/>
                 </a:solidFill>
                 <a:latin typeface="Calibri"/>
               </a:rPr>
-              <a:t>• Short early training window; later expanded with 1-year baselines</a:t>
-            </a:r>
-          </a:p>
-          <a:p>
-            <a:pPr>
-              <a:spcAft>
-                <a:spcPts val="600"/>
-              </a:spcAft>
-            </a:pPr>
-            <a:r>
-              <a:rPr sz="1600" b="0">
-                <a:solidFill>
-                  <a:srgbClr val="0F172A"/>
-                </a:solidFill>
-                <a:latin typeface="Calibri"/>
-              </a:rPr>
-              <a:t>• Cloud disk limits for raw historical imports</a:t>
-            </a:r>
-          </a:p>
-        </p:txBody>
-      </p:sp>
-      <p:sp>
-        <p:nvSpPr>
-          <p:cNvPr id="10" name="Rounded Rectangle 9"/>
-          <p:cNvSpPr/>
-          <p:nvPr/>
-        </p:nvSpPr>
-        <p:spPr>
-          <a:xfrm>
-            <a:off x="6217920" y="1188720"/>
-            <a:ext cx="5486400" cy="4754880"/>
-          </a:xfrm>
-          <a:prstGeom prst="roundRect">
-            <a:avLst/>
-          </a:prstGeom>
-          <a:solidFill>
-            <a:srgbClr val="F0FDFA"/>
-          </a:solidFill>
-          <a:ln w="19050">
-            <a:solidFill>
-              <a:srgbClr val="0D9488"/>
-            </a:solidFill>
-          </a:ln>
-        </p:spPr>
-        <p:style>
-          <a:lnRef idx="1">
-            <a:schemeClr val="accent1"/>
-          </a:lnRef>
-          <a:fillRef idx="3">
-            <a:schemeClr val="accent1"/>
-          </a:fillRef>
-          <a:effectRef idx="2">
-            <a:schemeClr val="accent1"/>
-          </a:effectRef>
-          <a:fontRef idx="minor">
-            <a:schemeClr val="lt1"/>
-          </a:fontRef>
-        </p:style>
-        <p:txBody>
-          <a:bodyPr rtlCol="0" anchor="ctr"/>
-          <a:lstStyle/>
-          <a:p>
-            <a:pPr algn="ctr"/>
-          </a:p>
-        </p:txBody>
-      </p:sp>
-      <p:sp>
-        <p:nvSpPr>
-          <p:cNvPr id="11" name="TextBox 10"/>
-          <p:cNvSpPr txBox="1"/>
-          <p:nvPr/>
-        </p:nvSpPr>
-        <p:spPr>
-          <a:xfrm>
-            <a:off x="6400800" y="1371600"/>
-            <a:ext cx="5029200" cy="365760"/>
-          </a:xfrm>
-          <a:prstGeom prst="rect">
-            <a:avLst/>
-          </a:prstGeom>
-          <a:noFill/>
-        </p:spPr>
-        <p:txBody>
-          <a:bodyPr wrap="square">
-            <a:spAutoFit/>
-          </a:bodyPr>
-          <a:lstStyle/>
-          <a:p>
-            <a:pPr algn="ctr"/>
-            <a:r>
-              <a:rPr sz="2000" b="1">
-                <a:solidFill>
-                  <a:srgbClr val="0D9488"/>
-                </a:solidFill>
-                <a:latin typeface="Calibri"/>
-              </a:rPr>
-              <a:t>Future work</a:t>
-            </a:r>
-          </a:p>
-        </p:txBody>
-      </p:sp>
-      <p:sp>
-        <p:nvSpPr>
-          <p:cNvPr id="12" name="TextBox 11"/>
-          <p:cNvSpPr txBox="1"/>
-          <p:nvPr/>
-        </p:nvSpPr>
-        <p:spPr>
-          <a:xfrm>
-            <a:off x="6400800" y="1920240"/>
-            <a:ext cx="5029200" cy="3657600"/>
-          </a:xfrm>
-          <a:prstGeom prst="rect">
-            <a:avLst/>
-          </a:prstGeom>
-          <a:noFill/>
-        </p:spPr>
-        <p:txBody>
-          <a:bodyPr wrap="square">
-            <a:spAutoFit/>
-          </a:bodyPr>
-          <a:lstStyle/>
-          <a:p>
-            <a:pPr>
-              <a:spcAft>
-                <a:spcPts val="600"/>
-              </a:spcAft>
-            </a:pPr>
-            <a:r>
-              <a:rPr sz="1600" b="0">
-                <a:solidFill>
-                  <a:srgbClr val="0F172A"/>
-                </a:solidFill>
-                <a:latin typeface="Calibri"/>
-              </a:rPr>
-              <a:t>• Cloud cron / Edge Function for 24×7 collection</a:t>
-            </a:r>
-          </a:p>
-          <a:p>
-            <a:pPr>
-              <a:spcAft>
-                <a:spcPts val="600"/>
-              </a:spcAft>
-            </a:pPr>
-            <a:r>
-              <a:rPr sz="1600" b="0">
-                <a:solidFill>
-                  <a:srgbClr val="0F172A"/>
-                </a:solidFill>
-                <a:latin typeface="Calibri"/>
-              </a:rPr>
-              <a:t>• Richer weather + holiday / event features</a:t>
-            </a:r>
-          </a:p>
-          <a:p>
-            <a:pPr>
-              <a:spcAft>
-                <a:spcPts val="600"/>
-              </a:spcAft>
-            </a:pPr>
-            <a:r>
-              <a:rPr sz="1600" b="0">
-                <a:solidFill>
-                  <a:srgbClr val="0F172A"/>
-                </a:solidFill>
-                <a:latin typeface="Calibri"/>
-              </a:rPr>
-              <a:t>• Persist trained models to storage</a:t>
-            </a:r>
-          </a:p>
-          <a:p>
-            <a:pPr>
-              <a:spcAft>
-                <a:spcPts val="600"/>
-              </a:spcAft>
-            </a:pPr>
-            <a:r>
-              <a:rPr sz="1600" b="0">
-                <a:solidFill>
-                  <a:srgbClr val="0F172A"/>
-                </a:solidFill>
-                <a:latin typeface="Calibri"/>
-              </a:rPr>
-              <a:t>• Vacancy level classes (low / mid / high)</a:t>
-            </a:r>
-          </a:p>
-          <a:p>
-            <a:pPr>
-              <a:spcAft>
-                <a:spcPts val="600"/>
-              </a:spcAft>
-            </a:pPr>
-            <a:r>
-              <a:rPr sz="1600" b="0">
-                <a:solidFill>
-                  <a:srgbClr val="0F172A"/>
-                </a:solidFill>
-                <a:latin typeface="Calibri"/>
-              </a:rPr>
-              <a:t>• Stronger LLM-generated suggestion copy</a:t>
-            </a:r>
-          </a:p>
-          <a:p>
-            <a:pPr>
-              <a:spcAft>
-                <a:spcPts val="600"/>
-              </a:spcAft>
-            </a:pPr>
-            <a:r>
-              <a:rPr sz="1600" b="0">
-                <a:solidFill>
-                  <a:srgbClr val="0F172A"/>
-                </a:solidFill>
-                <a:latin typeface="Calibri"/>
-              </a:rPr>
-              <a:t>• Deeper error analysis by district / hour</a:t>
+              <a:t>Foundation ready for longer history, richer features, and always-on cloud Extract, Transform, Load</a:t>
             </a:r>
           </a:p>
         </p:txBody>
